--- a/환경경제학/2026-1/환경경제학_Chapter_02.pptx
+++ b/환경경제학/2026-1/환경경제학_Chapter_02.pptx
@@ -5,7 +5,7 @@
     <p:sldMasterId id="2147483648" r:id="rId1"/>
   </p:sldMasterIdLst>
   <p:notesMasterIdLst>
-    <p:notesMasterId r:id="rId35"/>
+    <p:notesMasterId r:id="rId24"/>
   </p:notesMasterIdLst>
   <p:sldIdLst>
     <p:sldId id="375" r:id="rId2"/>
@@ -30,17 +30,6 @@
     <p:sldId id="577" r:id="rId21"/>
     <p:sldId id="578" r:id="rId22"/>
     <p:sldId id="364" r:id="rId23"/>
-    <p:sldId id="377" r:id="rId24"/>
-    <p:sldId id="376" r:id="rId25"/>
-    <p:sldId id="397" r:id="rId26"/>
-    <p:sldId id="396" r:id="rId27"/>
-    <p:sldId id="379" r:id="rId28"/>
-    <p:sldId id="380" r:id="rId29"/>
-    <p:sldId id="381" r:id="rId30"/>
-    <p:sldId id="382" r:id="rId31"/>
-    <p:sldId id="386" r:id="rId32"/>
-    <p:sldId id="387" r:id="rId33"/>
-    <p:sldId id="558" r:id="rId34"/>
   </p:sldIdLst>
   <p:sldSz cx="12192000" cy="6858000"/>
   <p:notesSz cx="6858000" cy="9144000"/>
@@ -240,7 +229,7 @@
           <a:p>
             <a:fld id="{4A5E00EF-AEA4-43E2-9451-8F9C59A39471}" type="datetimeFigureOut">
               <a:rPr lang="ko-KR" altLang="en-US" smtClean="0"/>
-              <a:t>2026-09-01</a:t>
+              <a:t>2026-09-02</a:t>
             </a:fld>
             <a:endParaRPr lang="ko-KR" altLang="en-US"/>
           </a:p>
@@ -662,7 +651,7 @@
           <a:p>
             <a:fld id="{CD32C56F-BD27-4999-9E6D-D4EACE3DA9F4}" type="datetime1">
               <a:rPr lang="ko-KR" altLang="en-US" smtClean="0"/>
-              <a:t>2026-09-01</a:t>
+              <a:t>2026-09-02</a:t>
             </a:fld>
             <a:endParaRPr lang="ko-KR" altLang="en-US"/>
           </a:p>
@@ -876,7 +865,7 @@
           <a:p>
             <a:fld id="{8EF4A19C-72C8-45CA-8E3F-68A7FA345D6C}" type="datetime1">
               <a:rPr lang="ko-KR" altLang="en-US" smtClean="0"/>
-              <a:t>2026-09-01</a:t>
+              <a:t>2026-09-02</a:t>
             </a:fld>
             <a:endParaRPr lang="ko-KR" altLang="en-US"/>
           </a:p>
@@ -1100,7 +1089,7 @@
           <a:p>
             <a:fld id="{56A175B2-010B-4341-954C-5F8F5C70B124}" type="datetime1">
               <a:rPr lang="ko-KR" altLang="en-US" smtClean="0"/>
-              <a:t>2026-09-01</a:t>
+              <a:t>2026-09-02</a:t>
             </a:fld>
             <a:endParaRPr lang="ko-KR" altLang="en-US"/>
           </a:p>
@@ -1314,7 +1303,7 @@
           <a:p>
             <a:fld id="{16B83F9E-22C9-45CA-9E85-070F1D3EF530}" type="datetime1">
               <a:rPr lang="ko-KR" altLang="en-US" smtClean="0"/>
-              <a:t>2026-09-01</a:t>
+              <a:t>2026-09-02</a:t>
             </a:fld>
             <a:endParaRPr lang="ko-KR" altLang="en-US"/>
           </a:p>
@@ -1605,7 +1594,7 @@
           <a:p>
             <a:fld id="{03278F45-FB3C-4C4D-B89A-7BC3F5F229F6}" type="datetime1">
               <a:rPr lang="ko-KR" altLang="en-US" smtClean="0"/>
-              <a:t>2026-09-01</a:t>
+              <a:t>2026-09-02</a:t>
             </a:fld>
             <a:endParaRPr lang="ko-KR" altLang="en-US"/>
           </a:p>
@@ -1998,7 +1987,7 @@
           <a:p>
             <a:fld id="{38FDAC3C-35A6-415C-9F03-738A6AC328B1}" type="datetime1">
               <a:rPr lang="ko-KR" altLang="en-US" smtClean="0"/>
-              <a:t>2026-09-01</a:t>
+              <a:t>2026-09-02</a:t>
             </a:fld>
             <a:endParaRPr lang="ko-KR" altLang="en-US"/>
           </a:p>
@@ -3592,7 +3581,7 @@
           <a:p>
             <a:fld id="{507A0DF1-AEE6-4B0D-89D2-351E7B3EF65C}" type="datetime1">
               <a:rPr lang="ko-KR" altLang="en-US" smtClean="0"/>
-              <a:t>2026-09-01</a:t>
+              <a:t>2026-09-02</a:t>
             </a:fld>
             <a:endParaRPr lang="ko-KR" altLang="en-US"/>
           </a:p>
@@ -4020,7 +4009,7 @@
           <a:p>
             <a:fld id="{CA93B8C9-630F-4D57-944D-04FD37CECCD3}" type="datetime1">
               <a:rPr lang="ko-KR" altLang="en-US" smtClean="0"/>
-              <a:t>2026-09-01</a:t>
+              <a:t>2026-09-02</a:t>
             </a:fld>
             <a:endParaRPr lang="ko-KR" altLang="en-US"/>
           </a:p>
@@ -4177,7 +4166,7 @@
           <a:p>
             <a:fld id="{E986165A-AC43-4902-9541-874ECD310BA3}" type="datetime1">
               <a:rPr lang="ko-KR" altLang="en-US" smtClean="0"/>
-              <a:t>2026-09-01</a:t>
+              <a:t>2026-09-02</a:t>
             </a:fld>
             <a:endParaRPr lang="ko-KR" altLang="en-US"/>
           </a:p>
@@ -4504,7 +4493,7 @@
           <a:p>
             <a:fld id="{47E6EE6D-2B0E-43A9-87A2-7354CDB998F4}" type="datetime1">
               <a:rPr lang="ko-KR" altLang="en-US" smtClean="0"/>
-              <a:t>2026-09-01</a:t>
+              <a:t>2026-09-02</a:t>
             </a:fld>
             <a:endParaRPr lang="ko-KR" altLang="en-US"/>
           </a:p>
@@ -4808,7 +4797,7 @@
           <a:p>
             <a:fld id="{5CC5944E-0BC8-4FAA-9F94-6B4B05834E10}" type="datetime1">
               <a:rPr lang="ko-KR" altLang="en-US" smtClean="0"/>
-              <a:t>2026-09-01</a:t>
+              <a:t>2026-09-02</a:t>
             </a:fld>
             <a:endParaRPr lang="ko-KR" altLang="en-US"/>
           </a:p>
@@ -12297,7 +12286,7 @@
         <p:spPr>
           <a:xfrm>
             <a:off x="288790" y="958844"/>
-            <a:ext cx="10707658" cy="2630015"/>
+            <a:ext cx="10707658" cy="2999347"/>
           </a:xfrm>
           <a:prstGeom prst="rect">
             <a:avLst/>
@@ -12472,9 +12461,12 @@
             </a:r>
             <a:r>
               <a:rPr lang="ko-KR" altLang="en-US" sz="1600" spc="-50" dirty="0"/>
-              <a:t>어떤 종류의 오염이 어느 정도의 발생 확률을 갖는지 확인이 필요</a:t>
-            </a:r>
-            <a:endParaRPr lang="en-US" altLang="ko-KR" sz="1600" spc="-50" dirty="0"/>
+              <a:t>어떤 종류의 오염이 어느 정도의 발생 확률을 갖는지 확인을 하고 관리하는 것이 필요하다</a:t>
+            </a:r>
+            <a:r>
+              <a:rPr lang="en-US" altLang="ko-KR" sz="1600" spc="-50" dirty="0"/>
+              <a:t>.</a:t>
+            </a:r>
           </a:p>
         </p:txBody>
       </p:sp>
@@ -12695,2654 +12687,6 @@
 </p:sld>
 </file>
 
-<file path=ppt/slides/slide23.xml><?xml version="1.0" encoding="utf-8"?>
-<p:sld xmlns:a="http://schemas.openxmlformats.org/drawingml/2006/main" xmlns:r="http://schemas.openxmlformats.org/officeDocument/2006/relationships" xmlns:p="http://schemas.openxmlformats.org/presentationml/2006/main">
-  <p:cSld>
-    <p:spTree>
-      <p:nvGrpSpPr>
-        <p:cNvPr id="1" name=""/>
-        <p:cNvGrpSpPr/>
-        <p:nvPr/>
-      </p:nvGrpSpPr>
-      <p:grpSpPr>
-        <a:xfrm>
-          <a:off x="0" y="0"/>
-          <a:ext cx="0" cy="0"/>
-          <a:chOff x="0" y="0"/>
-          <a:chExt cx="0" cy="0"/>
-        </a:xfrm>
-      </p:grpSpPr>
-      <p:sp>
-        <p:nvSpPr>
-          <p:cNvPr id="2" name="제목 1">
-            <a:extLst>
-              <a:ext uri="{FF2B5EF4-FFF2-40B4-BE49-F238E27FC236}">
-                <a16:creationId xmlns:a16="http://schemas.microsoft.com/office/drawing/2014/main" id="{5ECA8D82-0097-C179-A620-3BFDCD2DA53C}"/>
-              </a:ext>
-            </a:extLst>
-          </p:cNvPr>
-          <p:cNvSpPr>
-            <a:spLocks noGrp="1"/>
-          </p:cNvSpPr>
-          <p:nvPr>
-            <p:ph type="title"/>
-          </p:nvPr>
-        </p:nvSpPr>
-        <p:spPr/>
-        <p:txBody>
-          <a:bodyPr/>
-          <a:lstStyle/>
-          <a:p>
-            <a:r>
-              <a:rPr lang="ko-KR" altLang="en-US" dirty="0"/>
-              <a:t>실증경제학</a:t>
-            </a:r>
-            <a:r>
-              <a:rPr lang="en-US" altLang="ko-KR" dirty="0"/>
-              <a:t> vs. </a:t>
-            </a:r>
-            <a:r>
-              <a:rPr lang="ko-KR" altLang="en-US" dirty="0"/>
-              <a:t>규범경제학</a:t>
-            </a:r>
-          </a:p>
-        </p:txBody>
-      </p:sp>
-      <p:sp>
-        <p:nvSpPr>
-          <p:cNvPr id="4" name="슬라이드 번호 개체 틀 3">
-            <a:extLst>
-              <a:ext uri="{FF2B5EF4-FFF2-40B4-BE49-F238E27FC236}">
-                <a16:creationId xmlns:a16="http://schemas.microsoft.com/office/drawing/2014/main" id="{CF122CC2-A4CB-8C8B-ED93-CAFD82AB5AD2}"/>
-              </a:ext>
-            </a:extLst>
-          </p:cNvPr>
-          <p:cNvSpPr>
-            <a:spLocks noGrp="1"/>
-          </p:cNvSpPr>
-          <p:nvPr>
-            <p:ph type="sldNum" sz="quarter" idx="12"/>
-          </p:nvPr>
-        </p:nvSpPr>
-        <p:spPr/>
-        <p:txBody>
-          <a:bodyPr/>
-          <a:lstStyle/>
-          <a:p>
-            <a:fld id="{109C872D-39A9-4065-8BF3-6A613116E2A1}" type="slidenum">
-              <a:rPr lang="ko-KR" altLang="en-US" smtClean="0"/>
-              <a:t>23</a:t>
-            </a:fld>
-            <a:endParaRPr lang="ko-KR" altLang="en-US"/>
-          </a:p>
-        </p:txBody>
-      </p:sp>
-      <p:sp>
-        <p:nvSpPr>
-          <p:cNvPr id="5" name="TextBox 4">
-            <a:extLst>
-              <a:ext uri="{FF2B5EF4-FFF2-40B4-BE49-F238E27FC236}">
-                <a16:creationId xmlns:a16="http://schemas.microsoft.com/office/drawing/2014/main" id="{19627800-66DA-3E34-DECC-DF0EA00569DD}"/>
-              </a:ext>
-            </a:extLst>
-          </p:cNvPr>
-          <p:cNvSpPr txBox="1"/>
-          <p:nvPr/>
-        </p:nvSpPr>
-        <p:spPr>
-          <a:xfrm>
-            <a:off x="678872" y="1038536"/>
-            <a:ext cx="10975831" cy="4938340"/>
-          </a:xfrm>
-          <a:prstGeom prst="rect">
-            <a:avLst/>
-          </a:prstGeom>
-          <a:noFill/>
-        </p:spPr>
-        <p:txBody>
-          <a:bodyPr wrap="square" rtlCol="0" anchor="t">
-            <a:spAutoFit/>
-          </a:bodyPr>
-          <a:lstStyle/>
-          <a:p>
-            <a:pPr>
-              <a:lnSpc>
-                <a:spcPct val="150000"/>
-              </a:lnSpc>
-            </a:pPr>
-            <a:r>
-              <a:rPr lang="ko-KR" altLang="en-US" u="sng" dirty="0">
-                <a:ln w="3175">
-                  <a:noFill/>
-                </a:ln>
-                <a:latin typeface="HY헤드라인M" panose="02030600000101010101" pitchFamily="18" charset="-127"/>
-                <a:ea typeface="HY헤드라인M" panose="02030600000101010101" pitchFamily="18" charset="-127"/>
-              </a:rPr>
-              <a:t>실증경제학</a:t>
-            </a:r>
-            <a:endParaRPr lang="en-US" altLang="ko-KR" u="sng" dirty="0">
-              <a:ln w="3175">
-                <a:noFill/>
-              </a:ln>
-              <a:latin typeface="HY헤드라인M" panose="02030600000101010101" pitchFamily="18" charset="-127"/>
-              <a:ea typeface="HY헤드라인M" panose="02030600000101010101" pitchFamily="18" charset="-127"/>
-            </a:endParaRPr>
-          </a:p>
-          <a:p>
-            <a:pPr>
-              <a:lnSpc>
-                <a:spcPct val="150000"/>
-              </a:lnSpc>
-            </a:pPr>
-            <a:endParaRPr lang="en-US" altLang="ko-KR" sz="400" u="sng" dirty="0">
-              <a:ln w="3175">
-                <a:noFill/>
-              </a:ln>
-              <a:latin typeface="HY헤드라인M" panose="02030600000101010101" pitchFamily="18" charset="-127"/>
-              <a:ea typeface="HY헤드라인M" panose="02030600000101010101" pitchFamily="18" charset="-127"/>
-            </a:endParaRPr>
-          </a:p>
-          <a:p>
-            <a:pPr marL="92075">
-              <a:lnSpc>
-                <a:spcPct val="150000"/>
-              </a:lnSpc>
-            </a:pPr>
-            <a:r>
-              <a:rPr lang="ko-KR" altLang="en-US" sz="1600" spc="-50" dirty="0"/>
-              <a:t>경제현상을 설명하고</a:t>
-            </a:r>
-            <a:r>
-              <a:rPr lang="en-US" altLang="ko-KR" sz="1600" spc="-50" dirty="0"/>
-              <a:t>, </a:t>
-            </a:r>
-            <a:r>
-              <a:rPr lang="ko-KR" altLang="en-US" sz="1600" spc="-50" dirty="0"/>
-              <a:t>예측 분석하는 학문</a:t>
-            </a:r>
-            <a:r>
-              <a:rPr lang="en-US" altLang="ko-KR" sz="1600" spc="-50" dirty="0"/>
-              <a:t>. </a:t>
-            </a:r>
-            <a:r>
-              <a:rPr lang="ko-KR" altLang="en-US" sz="1600" spc="-50" dirty="0"/>
-              <a:t>가치판단 없이 원인과 결과를 규명</a:t>
-            </a:r>
-            <a:r>
-              <a:rPr lang="en-US" altLang="ko-KR" sz="1600" spc="-50" dirty="0"/>
-              <a:t>.</a:t>
-            </a:r>
-          </a:p>
-          <a:p>
-            <a:pPr marL="92075">
-              <a:lnSpc>
-                <a:spcPct val="150000"/>
-              </a:lnSpc>
-            </a:pPr>
-            <a:r>
-              <a:rPr lang="ko-KR" altLang="en-US" sz="1600" spc="-50" dirty="0"/>
-              <a:t>예시</a:t>
-            </a:r>
-            <a:r>
-              <a:rPr lang="en-US" altLang="ko-KR" sz="1600" spc="-50" dirty="0"/>
-              <a:t>: </a:t>
-            </a:r>
-            <a:r>
-              <a:rPr lang="ko-KR" altLang="en-US" sz="1600" spc="-50" dirty="0"/>
-              <a:t>탄소세가 </a:t>
-            </a:r>
-            <a:r>
-              <a:rPr lang="en-US" altLang="ko-KR" sz="1600" spc="-50" dirty="0"/>
-              <a:t>10,000</a:t>
-            </a:r>
-            <a:r>
-              <a:rPr lang="ko-KR" altLang="en-US" sz="1600" spc="-50" dirty="0"/>
-              <a:t>원</a:t>
-            </a:r>
-            <a:r>
-              <a:rPr lang="en-US" altLang="ko-KR" sz="1600" spc="-50" dirty="0"/>
-              <a:t>/tCO</a:t>
-            </a:r>
-            <a:r>
-              <a:rPr lang="en-US" altLang="ko-KR" sz="1600" spc="-50" baseline="-25000" dirty="0"/>
-              <a:t>2</a:t>
-            </a:r>
-            <a:r>
-              <a:rPr lang="en-US" altLang="ko-KR" sz="1600" spc="-50" dirty="0"/>
-              <a:t> </a:t>
-            </a:r>
-            <a:r>
-              <a:rPr lang="ko-KR" altLang="en-US" sz="1600" spc="-50" dirty="0"/>
-              <a:t>되면</a:t>
-            </a:r>
-            <a:r>
-              <a:rPr lang="en-US" altLang="ko-KR" sz="1600" spc="-50" dirty="0"/>
-              <a:t>, </a:t>
-            </a:r>
-            <a:r>
-              <a:rPr lang="ko-KR" altLang="en-US" sz="1600" spc="-50" dirty="0"/>
-              <a:t>온실가스는 얼만큼 감축될까</a:t>
-            </a:r>
-            <a:r>
-              <a:rPr lang="en-US" altLang="ko-KR" sz="1600" spc="-50" dirty="0"/>
-              <a:t>?</a:t>
-            </a:r>
-          </a:p>
-          <a:p>
-            <a:pPr marL="92075">
-              <a:lnSpc>
-                <a:spcPct val="150000"/>
-              </a:lnSpc>
-            </a:pPr>
-            <a:endParaRPr lang="en-US" altLang="ko-KR" sz="1600" u="sng" spc="-50" dirty="0">
-              <a:ln w="3175">
-                <a:noFill/>
-              </a:ln>
-              <a:latin typeface="HY헤드라인M" panose="02030600000101010101" pitchFamily="18" charset="-127"/>
-              <a:ea typeface="HY헤드라인M" panose="02030600000101010101" pitchFamily="18" charset="-127"/>
-            </a:endParaRPr>
-          </a:p>
-          <a:p>
-            <a:pPr>
-              <a:lnSpc>
-                <a:spcPct val="150000"/>
-              </a:lnSpc>
-            </a:pPr>
-            <a:r>
-              <a:rPr lang="ko-KR" altLang="en-US" u="sng" dirty="0">
-                <a:ln w="3175">
-                  <a:noFill/>
-                </a:ln>
-                <a:latin typeface="HY헤드라인M" panose="02030600000101010101" pitchFamily="18" charset="-127"/>
-                <a:ea typeface="HY헤드라인M" panose="02030600000101010101" pitchFamily="18" charset="-127"/>
-              </a:rPr>
-              <a:t>규범경제학</a:t>
-            </a:r>
-            <a:endParaRPr lang="en-US" altLang="ko-KR" u="sng" dirty="0">
-              <a:ln w="3175">
-                <a:noFill/>
-              </a:ln>
-              <a:latin typeface="HY헤드라인M" panose="02030600000101010101" pitchFamily="18" charset="-127"/>
-              <a:ea typeface="HY헤드라인M" panose="02030600000101010101" pitchFamily="18" charset="-127"/>
-            </a:endParaRPr>
-          </a:p>
-          <a:p>
-            <a:pPr>
-              <a:lnSpc>
-                <a:spcPct val="150000"/>
-              </a:lnSpc>
-            </a:pPr>
-            <a:endParaRPr lang="en-US" altLang="ko-KR" sz="400" u="sng" dirty="0">
-              <a:ln w="3175">
-                <a:noFill/>
-              </a:ln>
-              <a:latin typeface="HY헤드라인M" panose="02030600000101010101" pitchFamily="18" charset="-127"/>
-              <a:ea typeface="HY헤드라인M" panose="02030600000101010101" pitchFamily="18" charset="-127"/>
-            </a:endParaRPr>
-          </a:p>
-          <a:p>
-            <a:pPr marL="92075">
-              <a:lnSpc>
-                <a:spcPct val="150000"/>
-              </a:lnSpc>
-            </a:pPr>
-            <a:r>
-              <a:rPr lang="ko-KR" altLang="en-US" sz="1600" spc="-50" dirty="0"/>
-              <a:t>경제정책이나 상황에 대해 무엇이 </a:t>
-            </a:r>
-            <a:r>
-              <a:rPr lang="ko-KR" altLang="en-US" sz="1600" spc="-50" dirty="0" err="1"/>
-              <a:t>바람직한지</a:t>
-            </a:r>
-            <a:r>
-              <a:rPr lang="ko-KR" altLang="en-US" sz="1600" spc="-50" dirty="0"/>
-              <a:t> 논의하는 학문</a:t>
-            </a:r>
-            <a:r>
-              <a:rPr lang="en-US" altLang="ko-KR" sz="1600" spc="-50" dirty="0"/>
-              <a:t>. </a:t>
-            </a:r>
-            <a:r>
-              <a:rPr lang="ko-KR" altLang="en-US" sz="1600" spc="-50" dirty="0"/>
-              <a:t>가치 판단을 통해 정책방향을 제시</a:t>
-            </a:r>
-            <a:r>
-              <a:rPr lang="en-US" altLang="ko-KR" sz="1600" spc="-50" dirty="0"/>
-              <a:t>.</a:t>
-            </a:r>
-          </a:p>
-          <a:p>
-            <a:pPr marL="92075">
-              <a:lnSpc>
-                <a:spcPct val="150000"/>
-              </a:lnSpc>
-            </a:pPr>
-            <a:r>
-              <a:rPr lang="ko-KR" altLang="en-US" sz="1600" spc="-50" dirty="0"/>
-              <a:t>예시</a:t>
-            </a:r>
-            <a:r>
-              <a:rPr lang="en-US" altLang="ko-KR" sz="1600" spc="-50" dirty="0"/>
-              <a:t>: </a:t>
-            </a:r>
-            <a:r>
-              <a:rPr lang="ko-KR" altLang="en-US" sz="1600" spc="-50" dirty="0"/>
-              <a:t>탄소세를 얼마나 높여야 하는가</a:t>
-            </a:r>
-            <a:r>
-              <a:rPr lang="en-US" altLang="ko-KR" sz="1600" spc="-50" dirty="0"/>
-              <a:t>?</a:t>
-            </a:r>
-          </a:p>
-          <a:p>
-            <a:pPr marL="92075">
-              <a:lnSpc>
-                <a:spcPct val="150000"/>
-              </a:lnSpc>
-            </a:pPr>
-            <a:endParaRPr lang="en-US" altLang="ko-KR" sz="1600" spc="-50" dirty="0"/>
-          </a:p>
-          <a:p>
-            <a:pPr marL="92075">
-              <a:lnSpc>
-                <a:spcPct val="150000"/>
-              </a:lnSpc>
-            </a:pPr>
-            <a:r>
-              <a:rPr lang="ko-KR" altLang="en-US" u="sng" dirty="0">
-                <a:ln w="3175">
-                  <a:noFill/>
-                </a:ln>
-                <a:latin typeface="HY헤드라인M" panose="02030600000101010101" pitchFamily="18" charset="-127"/>
-                <a:ea typeface="HY헤드라인M" panose="02030600000101010101" pitchFamily="18" charset="-127"/>
-              </a:rPr>
-              <a:t>실증 </a:t>
-            </a:r>
-            <a:r>
-              <a:rPr lang="en-US" altLang="ko-KR" u="sng" dirty="0">
-                <a:ln w="3175">
-                  <a:noFill/>
-                </a:ln>
-                <a:latin typeface="HY헤드라인M" panose="02030600000101010101" pitchFamily="18" charset="-127"/>
-                <a:ea typeface="HY헤드라인M" panose="02030600000101010101" pitchFamily="18" charset="-127"/>
-              </a:rPr>
-              <a:t>-&gt;</a:t>
-            </a:r>
-            <a:r>
-              <a:rPr lang="ko-KR" altLang="en-US" u="sng" dirty="0">
-                <a:ln w="3175">
-                  <a:noFill/>
-                </a:ln>
-                <a:latin typeface="HY헤드라인M" panose="02030600000101010101" pitchFamily="18" charset="-127"/>
-                <a:ea typeface="HY헤드라인M" panose="02030600000101010101" pitchFamily="18" charset="-127"/>
-              </a:rPr>
-              <a:t> 규범</a:t>
-            </a:r>
-            <a:r>
-              <a:rPr lang="en-US" altLang="ko-KR" sz="1600" spc="-50" dirty="0"/>
-              <a:t>: </a:t>
-            </a:r>
-            <a:r>
-              <a:rPr lang="ko-KR" altLang="en-US" sz="1600" spc="-50" dirty="0"/>
-              <a:t>실증적 결과가 있어야</a:t>
-            </a:r>
-            <a:r>
-              <a:rPr lang="en-US" altLang="ko-KR" sz="1600" spc="-50" dirty="0"/>
-              <a:t>, </a:t>
-            </a:r>
-            <a:r>
-              <a:rPr lang="ko-KR" altLang="en-US" sz="1600" spc="-50" dirty="0"/>
-              <a:t>가치판단을 통해 건설적인 토론이 가능</a:t>
-            </a:r>
-            <a:endParaRPr lang="en-US" altLang="ko-KR" sz="1600" spc="-50" dirty="0"/>
-          </a:p>
-          <a:p>
-            <a:pPr marL="92075">
-              <a:lnSpc>
-                <a:spcPct val="150000"/>
-              </a:lnSpc>
-            </a:pPr>
-            <a:endParaRPr lang="en-US" altLang="ko-KR" sz="1600" spc="-50" dirty="0"/>
-          </a:p>
-          <a:p>
-            <a:pPr>
-              <a:lnSpc>
-                <a:spcPct val="150000"/>
-              </a:lnSpc>
-            </a:pPr>
-            <a:r>
-              <a:rPr lang="ko-KR" altLang="en-US" u="sng" dirty="0">
-                <a:ln w="3175">
-                  <a:noFill/>
-                </a:ln>
-                <a:latin typeface="HY헤드라인M" panose="02030600000101010101" pitchFamily="18" charset="-127"/>
-                <a:ea typeface="HY헤드라인M" panose="02030600000101010101" pitchFamily="18" charset="-127"/>
-              </a:rPr>
-              <a:t>우리 수업에서는</a:t>
-            </a:r>
-            <a:endParaRPr lang="en-US" altLang="ko-KR" u="sng" dirty="0">
-              <a:ln w="3175">
-                <a:noFill/>
-              </a:ln>
-              <a:latin typeface="HY헤드라인M" panose="02030600000101010101" pitchFamily="18" charset="-127"/>
-              <a:ea typeface="HY헤드라인M" panose="02030600000101010101" pitchFamily="18" charset="-127"/>
-            </a:endParaRPr>
-          </a:p>
-          <a:p>
-            <a:pPr>
-              <a:lnSpc>
-                <a:spcPct val="150000"/>
-              </a:lnSpc>
-            </a:pPr>
-            <a:endParaRPr lang="en-US" altLang="ko-KR" sz="400" u="sng" dirty="0">
-              <a:ln w="3175">
-                <a:noFill/>
-              </a:ln>
-              <a:latin typeface="HY헤드라인M" panose="02030600000101010101" pitchFamily="18" charset="-127"/>
-              <a:ea typeface="HY헤드라인M" panose="02030600000101010101" pitchFamily="18" charset="-127"/>
-            </a:endParaRPr>
-          </a:p>
-          <a:p>
-            <a:pPr marL="92075">
-              <a:lnSpc>
-                <a:spcPct val="150000"/>
-              </a:lnSpc>
-            </a:pPr>
-            <a:r>
-              <a:rPr lang="ko-KR" altLang="en-US" sz="1600" spc="-50" dirty="0"/>
-              <a:t>우리 수업에서는 실증경제학의 범위 내에서 환경경제학을 배울 예정</a:t>
-            </a:r>
-            <a:r>
-              <a:rPr lang="en-US" altLang="ko-KR" sz="1600" spc="-50" dirty="0"/>
-              <a:t>.</a:t>
-            </a:r>
-          </a:p>
-        </p:txBody>
-      </p:sp>
-    </p:spTree>
-    <p:extLst>
-      <p:ext uri="{BB962C8B-B14F-4D97-AF65-F5344CB8AC3E}">
-        <p14:creationId xmlns:p14="http://schemas.microsoft.com/office/powerpoint/2010/main" val="2058940542"/>
-      </p:ext>
-    </p:extLst>
-  </p:cSld>
-  <p:clrMapOvr>
-    <a:masterClrMapping/>
-  </p:clrMapOvr>
-</p:sld>
-</file>
-
-<file path=ppt/slides/slide24.xml><?xml version="1.0" encoding="utf-8"?>
-<p:sld xmlns:a="http://schemas.openxmlformats.org/drawingml/2006/main" xmlns:r="http://schemas.openxmlformats.org/officeDocument/2006/relationships" xmlns:p="http://schemas.openxmlformats.org/presentationml/2006/main">
-  <p:cSld>
-    <p:spTree>
-      <p:nvGrpSpPr>
-        <p:cNvPr id="1" name=""/>
-        <p:cNvGrpSpPr/>
-        <p:nvPr/>
-      </p:nvGrpSpPr>
-      <p:grpSpPr>
-        <a:xfrm>
-          <a:off x="0" y="0"/>
-          <a:ext cx="0" cy="0"/>
-          <a:chOff x="0" y="0"/>
-          <a:chExt cx="0" cy="0"/>
-        </a:xfrm>
-      </p:grpSpPr>
-      <p:sp>
-        <p:nvSpPr>
-          <p:cNvPr id="2" name="제목 1">
-            <a:extLst>
-              <a:ext uri="{FF2B5EF4-FFF2-40B4-BE49-F238E27FC236}">
-                <a16:creationId xmlns:a16="http://schemas.microsoft.com/office/drawing/2014/main" id="{708E53AA-7D50-5F4A-320F-293F315471D7}"/>
-              </a:ext>
-            </a:extLst>
-          </p:cNvPr>
-          <p:cNvSpPr>
-            <a:spLocks noGrp="1"/>
-          </p:cNvSpPr>
-          <p:nvPr>
-            <p:ph type="title"/>
-          </p:nvPr>
-        </p:nvSpPr>
-        <p:spPr/>
-        <p:txBody>
-          <a:bodyPr/>
-          <a:lstStyle/>
-          <a:p>
-            <a:r>
-              <a:rPr lang="ko-KR" altLang="en-US" dirty="0"/>
-              <a:t>환경 경제학</a:t>
-            </a:r>
-            <a:r>
-              <a:rPr lang="en-US" altLang="ko-KR" dirty="0"/>
-              <a:t>?</a:t>
-            </a:r>
-            <a:endParaRPr lang="ko-KR" altLang="en-US" dirty="0"/>
-          </a:p>
-        </p:txBody>
-      </p:sp>
-      <p:sp>
-        <p:nvSpPr>
-          <p:cNvPr id="4" name="슬라이드 번호 개체 틀 3">
-            <a:extLst>
-              <a:ext uri="{FF2B5EF4-FFF2-40B4-BE49-F238E27FC236}">
-                <a16:creationId xmlns:a16="http://schemas.microsoft.com/office/drawing/2014/main" id="{0E66E9B2-B0DB-FDCD-AA50-636EA4E5B253}"/>
-              </a:ext>
-            </a:extLst>
-          </p:cNvPr>
-          <p:cNvSpPr>
-            <a:spLocks noGrp="1"/>
-          </p:cNvSpPr>
-          <p:nvPr>
-            <p:ph type="sldNum" sz="quarter" idx="12"/>
-          </p:nvPr>
-        </p:nvSpPr>
-        <p:spPr/>
-        <p:txBody>
-          <a:bodyPr/>
-          <a:lstStyle/>
-          <a:p>
-            <a:fld id="{109C872D-39A9-4065-8BF3-6A613116E2A1}" type="slidenum">
-              <a:rPr lang="ko-KR" altLang="en-US" smtClean="0"/>
-              <a:t>24</a:t>
-            </a:fld>
-            <a:endParaRPr lang="ko-KR" altLang="en-US"/>
-          </a:p>
-        </p:txBody>
-      </p:sp>
-      <p:sp>
-        <p:nvSpPr>
-          <p:cNvPr id="3" name="TextBox 2">
-            <a:extLst>
-              <a:ext uri="{FF2B5EF4-FFF2-40B4-BE49-F238E27FC236}">
-                <a16:creationId xmlns:a16="http://schemas.microsoft.com/office/drawing/2014/main" id="{9726B103-0BDB-EFC8-6738-366A56F8477A}"/>
-              </a:ext>
-            </a:extLst>
-          </p:cNvPr>
-          <p:cNvSpPr txBox="1"/>
-          <p:nvPr/>
-        </p:nvSpPr>
-        <p:spPr>
-          <a:xfrm>
-            <a:off x="678872" y="1038536"/>
-            <a:ext cx="11087678" cy="5261505"/>
-          </a:xfrm>
-          <a:prstGeom prst="rect">
-            <a:avLst/>
-          </a:prstGeom>
-          <a:noFill/>
-        </p:spPr>
-        <p:txBody>
-          <a:bodyPr wrap="square" rtlCol="0" anchor="t">
-            <a:spAutoFit/>
-          </a:bodyPr>
-          <a:lstStyle/>
-          <a:p>
-            <a:pPr>
-              <a:lnSpc>
-                <a:spcPct val="150000"/>
-              </a:lnSpc>
-            </a:pPr>
-            <a:r>
-              <a:rPr lang="ko-KR" altLang="en-US" u="sng" dirty="0">
-                <a:ln w="3175">
-                  <a:noFill/>
-                </a:ln>
-                <a:latin typeface="HY헤드라인M" panose="02030600000101010101" pitchFamily="18" charset="-127"/>
-                <a:ea typeface="HY헤드라인M" panose="02030600000101010101" pitchFamily="18" charset="-127"/>
-              </a:rPr>
-              <a:t>미시 경제학</a:t>
-            </a:r>
-            <a:endParaRPr lang="en-US" altLang="ko-KR" u="sng" dirty="0">
-              <a:ln w="3175">
-                <a:noFill/>
-              </a:ln>
-              <a:latin typeface="HY헤드라인M" panose="02030600000101010101" pitchFamily="18" charset="-127"/>
-              <a:ea typeface="HY헤드라인M" panose="02030600000101010101" pitchFamily="18" charset="-127"/>
-            </a:endParaRPr>
-          </a:p>
-          <a:p>
-            <a:pPr>
-              <a:lnSpc>
-                <a:spcPct val="150000"/>
-              </a:lnSpc>
-            </a:pPr>
-            <a:endParaRPr lang="en-US" altLang="ko-KR" sz="400" u="sng" dirty="0">
-              <a:ln w="3175">
-                <a:noFill/>
-              </a:ln>
-              <a:latin typeface="HY헤드라인M" panose="02030600000101010101" pitchFamily="18" charset="-127"/>
-              <a:ea typeface="HY헤드라인M" panose="02030600000101010101" pitchFamily="18" charset="-127"/>
-            </a:endParaRPr>
-          </a:p>
-          <a:p>
-            <a:pPr marL="92075">
-              <a:lnSpc>
-                <a:spcPct val="150000"/>
-              </a:lnSpc>
-            </a:pPr>
-            <a:r>
-              <a:rPr lang="ko-KR" altLang="en-US" sz="1600" spc="-50" dirty="0"/>
-              <a:t>경제주체가 어떤 동기를 가지고 어떻게 생산행위나 소비행위와 같은 경제적인 의사결정을 하는지 연구하는 학문</a:t>
-            </a:r>
-            <a:endParaRPr lang="en-US" altLang="ko-KR" sz="1600" spc="-50" dirty="0"/>
-          </a:p>
-          <a:p>
-            <a:pPr marL="92075">
-              <a:lnSpc>
-                <a:spcPct val="150000"/>
-              </a:lnSpc>
-            </a:pPr>
-            <a:endParaRPr lang="en-US" altLang="ko-KR" sz="1600" u="sng" spc="-50" dirty="0">
-              <a:ln w="3175">
-                <a:noFill/>
-              </a:ln>
-              <a:latin typeface="HY헤드라인M" panose="02030600000101010101" pitchFamily="18" charset="-127"/>
-              <a:ea typeface="HY헤드라인M" panose="02030600000101010101" pitchFamily="18" charset="-127"/>
-            </a:endParaRPr>
-          </a:p>
-          <a:p>
-            <a:pPr>
-              <a:lnSpc>
-                <a:spcPct val="150000"/>
-              </a:lnSpc>
-            </a:pPr>
-            <a:r>
-              <a:rPr lang="ko-KR" altLang="en-US" u="sng" dirty="0">
-                <a:ln w="3175">
-                  <a:noFill/>
-                </a:ln>
-                <a:latin typeface="HY헤드라인M" panose="02030600000101010101" pitchFamily="18" charset="-127"/>
-                <a:ea typeface="HY헤드라인M" panose="02030600000101010101" pitchFamily="18" charset="-127"/>
-              </a:rPr>
-              <a:t>거시 경제학</a:t>
-            </a:r>
-            <a:endParaRPr lang="en-US" altLang="ko-KR" u="sng" dirty="0">
-              <a:ln w="3175">
-                <a:noFill/>
-              </a:ln>
-              <a:latin typeface="HY헤드라인M" panose="02030600000101010101" pitchFamily="18" charset="-127"/>
-              <a:ea typeface="HY헤드라인M" panose="02030600000101010101" pitchFamily="18" charset="-127"/>
-            </a:endParaRPr>
-          </a:p>
-          <a:p>
-            <a:pPr>
-              <a:lnSpc>
-                <a:spcPct val="150000"/>
-              </a:lnSpc>
-            </a:pPr>
-            <a:endParaRPr lang="en-US" altLang="ko-KR" sz="400" u="sng" dirty="0">
-              <a:ln w="3175">
-                <a:noFill/>
-              </a:ln>
-              <a:latin typeface="HY헤드라인M" panose="02030600000101010101" pitchFamily="18" charset="-127"/>
-              <a:ea typeface="HY헤드라인M" panose="02030600000101010101" pitchFamily="18" charset="-127"/>
-            </a:endParaRPr>
-          </a:p>
-          <a:p>
-            <a:pPr marL="92075">
-              <a:lnSpc>
-                <a:spcPct val="150000"/>
-              </a:lnSpc>
-            </a:pPr>
-            <a:r>
-              <a:rPr lang="ko-KR" altLang="en-US" sz="1600" spc="-50" dirty="0"/>
-              <a:t>국민총생산액</a:t>
-            </a:r>
-            <a:r>
-              <a:rPr lang="en-US" altLang="ko-KR" sz="1600" spc="-50" dirty="0"/>
-              <a:t>, </a:t>
-            </a:r>
-            <a:r>
-              <a:rPr lang="ko-KR" altLang="en-US" sz="1600" spc="-50" dirty="0"/>
-              <a:t>성장률</a:t>
-            </a:r>
-            <a:r>
-              <a:rPr lang="en-US" altLang="ko-KR" sz="1600" spc="-50" dirty="0"/>
-              <a:t>, </a:t>
-            </a:r>
-            <a:r>
-              <a:rPr lang="ko-KR" altLang="en-US" sz="1600" spc="-50" dirty="0"/>
-              <a:t>실업률</a:t>
-            </a:r>
-            <a:r>
-              <a:rPr lang="en-US" altLang="ko-KR" sz="1600" spc="-50" dirty="0"/>
-              <a:t>, </a:t>
-            </a:r>
-            <a:r>
-              <a:rPr lang="ko-KR" altLang="en-US" sz="1600" spc="-50" dirty="0"/>
-              <a:t>이자율 등 국가 경제의 거시적인 변수들이 형성되고 움직이는 관계를 연구하는 학문</a:t>
-            </a:r>
-            <a:endParaRPr lang="en-US" altLang="ko-KR" sz="1600" spc="-50" dirty="0"/>
-          </a:p>
-          <a:p>
-            <a:pPr marL="92075">
-              <a:lnSpc>
-                <a:spcPct val="150000"/>
-              </a:lnSpc>
-            </a:pPr>
-            <a:endParaRPr lang="en-US" altLang="ko-KR" sz="1600" spc="-50" dirty="0"/>
-          </a:p>
-          <a:p>
-            <a:pPr>
-              <a:lnSpc>
-                <a:spcPct val="150000"/>
-              </a:lnSpc>
-            </a:pPr>
-            <a:r>
-              <a:rPr lang="ko-KR" altLang="en-US" u="sng" dirty="0">
-                <a:ln w="3175">
-                  <a:noFill/>
-                </a:ln>
-                <a:latin typeface="HY헤드라인M" panose="02030600000101010101" pitchFamily="18" charset="-127"/>
-                <a:ea typeface="HY헤드라인M" panose="02030600000101010101" pitchFamily="18" charset="-127"/>
-              </a:rPr>
-              <a:t>환경 경제학</a:t>
-            </a:r>
-            <a:endParaRPr lang="en-US" altLang="ko-KR" u="sng" dirty="0">
-              <a:ln w="3175">
-                <a:noFill/>
-              </a:ln>
-              <a:latin typeface="HY헤드라인M" panose="02030600000101010101" pitchFamily="18" charset="-127"/>
-              <a:ea typeface="HY헤드라인M" panose="02030600000101010101" pitchFamily="18" charset="-127"/>
-            </a:endParaRPr>
-          </a:p>
-          <a:p>
-            <a:pPr>
-              <a:lnSpc>
-                <a:spcPct val="150000"/>
-              </a:lnSpc>
-            </a:pPr>
-            <a:endParaRPr lang="en-US" altLang="ko-KR" sz="400" u="sng" dirty="0">
-              <a:ln w="3175">
-                <a:noFill/>
-              </a:ln>
-              <a:latin typeface="HY헤드라인M" panose="02030600000101010101" pitchFamily="18" charset="-127"/>
-              <a:ea typeface="HY헤드라인M" panose="02030600000101010101" pitchFamily="18" charset="-127"/>
-            </a:endParaRPr>
-          </a:p>
-          <a:p>
-            <a:pPr marL="92075">
-              <a:lnSpc>
-                <a:spcPct val="150000"/>
-              </a:lnSpc>
-            </a:pPr>
-            <a:r>
-              <a:rPr lang="ko-KR" altLang="en-US" sz="1600" spc="-50" dirty="0"/>
-              <a:t>자연환경</a:t>
-            </a:r>
-            <a:r>
-              <a:rPr lang="en-US" altLang="ko-KR" sz="1600" spc="-50" dirty="0"/>
-              <a:t> </a:t>
-            </a:r>
-            <a:r>
-              <a:rPr lang="ko-KR" altLang="en-US" sz="1600" spc="-50" dirty="0"/>
-              <a:t>혹은 환경자원을 어떤 방식으로 개발하고 </a:t>
-            </a:r>
-            <a:r>
-              <a:rPr lang="ko-KR" altLang="en-US" sz="1600" spc="-50" dirty="0" err="1"/>
-              <a:t>관리할지의</a:t>
-            </a:r>
-            <a:r>
-              <a:rPr lang="ko-KR" altLang="en-US" sz="1600" spc="-50" dirty="0"/>
-              <a:t> 문제를 경제학적인 원리를 적용하여 연구하는 학문 </a:t>
-            </a:r>
-            <a:endParaRPr lang="en-US" altLang="ko-KR" sz="1600" spc="-50" dirty="0"/>
-          </a:p>
-          <a:p>
-            <a:pPr marL="835025" lvl="1" indent="-285750">
-              <a:lnSpc>
-                <a:spcPct val="150000"/>
-              </a:lnSpc>
-              <a:buFont typeface="Wingdings" panose="05000000000000000000" pitchFamily="2" charset="2"/>
-              <a:buChar char="ü"/>
-            </a:pPr>
-            <a:r>
-              <a:rPr lang="ko-KR" altLang="en-US" sz="1600" spc="-50" dirty="0"/>
-              <a:t>경제주체가 자연환경에 어떤 식으로 영향을 줄까</a:t>
-            </a:r>
-            <a:r>
-              <a:rPr lang="en-US" altLang="ko-KR" sz="1600" spc="-50" dirty="0"/>
-              <a:t>?</a:t>
-            </a:r>
-          </a:p>
-          <a:p>
-            <a:pPr marL="835025" lvl="1" indent="-285750">
-              <a:lnSpc>
-                <a:spcPct val="150000"/>
-              </a:lnSpc>
-              <a:buFont typeface="Wingdings" panose="05000000000000000000" pitchFamily="2" charset="2"/>
-              <a:buChar char="ü"/>
-            </a:pPr>
-            <a:r>
-              <a:rPr lang="ko-KR" altLang="en-US" sz="1600" spc="-50" dirty="0"/>
-              <a:t>인간의 소비 욕구 충족과 자연생태계 보존이 조화를 이루기 위해 정부 정책이나 경제제도가 어떻게 형성되야 할까</a:t>
-            </a:r>
-            <a:r>
-              <a:rPr lang="en-US" altLang="ko-KR" sz="1600" spc="-50" dirty="0"/>
-              <a:t>?</a:t>
-            </a:r>
-          </a:p>
-          <a:p>
-            <a:pPr marL="835025" lvl="1" indent="-285750">
-              <a:lnSpc>
-                <a:spcPct val="150000"/>
-              </a:lnSpc>
-              <a:buFont typeface="Wingdings" panose="05000000000000000000" pitchFamily="2" charset="2"/>
-              <a:buChar char="ü"/>
-            </a:pPr>
-            <a:endParaRPr lang="en-US" altLang="ko-KR" sz="1600" spc="-50" dirty="0"/>
-          </a:p>
-          <a:p>
-            <a:pPr marL="92075">
-              <a:lnSpc>
-                <a:spcPct val="150000"/>
-              </a:lnSpc>
-            </a:pPr>
-            <a:endParaRPr lang="en-US" altLang="ko-KR" sz="1600" spc="-50" dirty="0"/>
-          </a:p>
-          <a:p>
-            <a:pPr marL="92075">
-              <a:lnSpc>
-                <a:spcPct val="150000"/>
-              </a:lnSpc>
-            </a:pPr>
-            <a:endParaRPr lang="en-US" altLang="ko-KR" sz="1600" spc="-50" dirty="0"/>
-          </a:p>
-        </p:txBody>
-      </p:sp>
-    </p:spTree>
-    <p:extLst>
-      <p:ext uri="{BB962C8B-B14F-4D97-AF65-F5344CB8AC3E}">
-        <p14:creationId xmlns:p14="http://schemas.microsoft.com/office/powerpoint/2010/main" val="152177136"/>
-      </p:ext>
-    </p:extLst>
-  </p:cSld>
-  <p:clrMapOvr>
-    <a:masterClrMapping/>
-  </p:clrMapOvr>
-</p:sld>
-</file>
-
-<file path=ppt/slides/slide25.xml><?xml version="1.0" encoding="utf-8"?>
-<p:sld xmlns:a="http://schemas.openxmlformats.org/drawingml/2006/main" xmlns:r="http://schemas.openxmlformats.org/officeDocument/2006/relationships" xmlns:p="http://schemas.openxmlformats.org/presentationml/2006/main">
-  <p:cSld>
-    <p:spTree>
-      <p:nvGrpSpPr>
-        <p:cNvPr id="1" name="">
-          <a:extLst>
-            <a:ext uri="{FF2B5EF4-FFF2-40B4-BE49-F238E27FC236}">
-              <a16:creationId xmlns:a16="http://schemas.microsoft.com/office/drawing/2014/main" id="{A6445874-0A12-493E-A9C8-38C1437AFCB9}"/>
-            </a:ext>
-          </a:extLst>
-        </p:cNvPr>
-        <p:cNvGrpSpPr/>
-        <p:nvPr/>
-      </p:nvGrpSpPr>
-      <p:grpSpPr>
-        <a:xfrm>
-          <a:off x="0" y="0"/>
-          <a:ext cx="0" cy="0"/>
-          <a:chOff x="0" y="0"/>
-          <a:chExt cx="0" cy="0"/>
-        </a:xfrm>
-      </p:grpSpPr>
-      <p:sp>
-        <p:nvSpPr>
-          <p:cNvPr id="2" name="제목 1">
-            <a:extLst>
-              <a:ext uri="{FF2B5EF4-FFF2-40B4-BE49-F238E27FC236}">
-                <a16:creationId xmlns:a16="http://schemas.microsoft.com/office/drawing/2014/main" id="{5B0FAA29-F8FE-86C7-FD10-48C4AAED9183}"/>
-              </a:ext>
-            </a:extLst>
-          </p:cNvPr>
-          <p:cNvSpPr>
-            <a:spLocks noGrp="1"/>
-          </p:cNvSpPr>
-          <p:nvPr>
-            <p:ph type="title"/>
-          </p:nvPr>
-        </p:nvSpPr>
-        <p:spPr/>
-        <p:txBody>
-          <a:bodyPr/>
-          <a:lstStyle/>
-          <a:p>
-            <a:r>
-              <a:rPr lang="ko-KR" altLang="en-US" dirty="0"/>
-              <a:t>환경경제학에서 다루는 여러가지 주제들</a:t>
-            </a:r>
-          </a:p>
-        </p:txBody>
-      </p:sp>
-      <p:sp>
-        <p:nvSpPr>
-          <p:cNvPr id="4" name="슬라이드 번호 개체 틀 3">
-            <a:extLst>
-              <a:ext uri="{FF2B5EF4-FFF2-40B4-BE49-F238E27FC236}">
-                <a16:creationId xmlns:a16="http://schemas.microsoft.com/office/drawing/2014/main" id="{9EE89583-A4A0-DA9D-4C70-6F0EE66E60CC}"/>
-              </a:ext>
-            </a:extLst>
-          </p:cNvPr>
-          <p:cNvSpPr>
-            <a:spLocks noGrp="1"/>
-          </p:cNvSpPr>
-          <p:nvPr>
-            <p:ph type="sldNum" sz="quarter" idx="12"/>
-          </p:nvPr>
-        </p:nvSpPr>
-        <p:spPr/>
-        <p:txBody>
-          <a:bodyPr/>
-          <a:lstStyle/>
-          <a:p>
-            <a:fld id="{109C872D-39A9-4065-8BF3-6A613116E2A1}" type="slidenum">
-              <a:rPr lang="ko-KR" altLang="en-US" smtClean="0"/>
-              <a:t>25</a:t>
-            </a:fld>
-            <a:endParaRPr lang="ko-KR" altLang="en-US"/>
-          </a:p>
-        </p:txBody>
-      </p:sp>
-      <p:pic>
-        <p:nvPicPr>
-          <p:cNvPr id="22" name="그림 21">
-            <a:extLst>
-              <a:ext uri="{FF2B5EF4-FFF2-40B4-BE49-F238E27FC236}">
-                <a16:creationId xmlns:a16="http://schemas.microsoft.com/office/drawing/2014/main" id="{534B9423-B5DC-0506-9A06-5986231E4793}"/>
-              </a:ext>
-            </a:extLst>
-          </p:cNvPr>
-          <p:cNvPicPr>
-            <a:picLocks noChangeAspect="1"/>
-          </p:cNvPicPr>
-          <p:nvPr/>
-        </p:nvPicPr>
-        <p:blipFill>
-          <a:blip r:embed="rId2"/>
-          <a:stretch>
-            <a:fillRect/>
-          </a:stretch>
-        </p:blipFill>
-        <p:spPr>
-          <a:xfrm>
-            <a:off x="637492" y="1471205"/>
-            <a:ext cx="4945726" cy="609112"/>
-          </a:xfrm>
-          <a:prstGeom prst="rect">
-            <a:avLst/>
-          </a:prstGeom>
-        </p:spPr>
-      </p:pic>
-      <p:pic>
-        <p:nvPicPr>
-          <p:cNvPr id="24" name="그림 23">
-            <a:extLst>
-              <a:ext uri="{FF2B5EF4-FFF2-40B4-BE49-F238E27FC236}">
-                <a16:creationId xmlns:a16="http://schemas.microsoft.com/office/drawing/2014/main" id="{D6B2A91B-2FE1-DB34-1A60-2C222B53C102}"/>
-              </a:ext>
-            </a:extLst>
-          </p:cNvPr>
-          <p:cNvPicPr>
-            <a:picLocks noChangeAspect="1"/>
-          </p:cNvPicPr>
-          <p:nvPr/>
-        </p:nvPicPr>
-        <p:blipFill>
-          <a:blip r:embed="rId3"/>
-          <a:stretch>
-            <a:fillRect/>
-          </a:stretch>
-        </p:blipFill>
-        <p:spPr>
-          <a:xfrm>
-            <a:off x="1320603" y="2393950"/>
-            <a:ext cx="3579505" cy="232005"/>
-          </a:xfrm>
-          <a:prstGeom prst="rect">
-            <a:avLst/>
-          </a:prstGeom>
-        </p:spPr>
-      </p:pic>
-      <p:pic>
-        <p:nvPicPr>
-          <p:cNvPr id="26" name="그림 25">
-            <a:extLst>
-              <a:ext uri="{FF2B5EF4-FFF2-40B4-BE49-F238E27FC236}">
-                <a16:creationId xmlns:a16="http://schemas.microsoft.com/office/drawing/2014/main" id="{F2617E05-DAC6-6BEE-3EE8-3DBEDF01EB46}"/>
-              </a:ext>
-            </a:extLst>
-          </p:cNvPr>
-          <p:cNvPicPr>
-            <a:picLocks noChangeAspect="1"/>
-          </p:cNvPicPr>
-          <p:nvPr/>
-        </p:nvPicPr>
-        <p:blipFill>
-          <a:blip r:embed="rId4"/>
-          <a:stretch>
-            <a:fillRect/>
-          </a:stretch>
-        </p:blipFill>
-        <p:spPr>
-          <a:xfrm>
-            <a:off x="1320603" y="3053258"/>
-            <a:ext cx="3579505" cy="2754379"/>
-          </a:xfrm>
-          <a:prstGeom prst="rect">
-            <a:avLst/>
-          </a:prstGeom>
-        </p:spPr>
-      </p:pic>
-      <p:pic>
-        <p:nvPicPr>
-          <p:cNvPr id="9" name="그림 8">
-            <a:extLst>
-              <a:ext uri="{FF2B5EF4-FFF2-40B4-BE49-F238E27FC236}">
-                <a16:creationId xmlns:a16="http://schemas.microsoft.com/office/drawing/2014/main" id="{F8EACF95-95D7-C2E4-6450-BA37B972839C}"/>
-              </a:ext>
-            </a:extLst>
-          </p:cNvPr>
-          <p:cNvPicPr>
-            <a:picLocks noChangeAspect="1"/>
-          </p:cNvPicPr>
-          <p:nvPr/>
-        </p:nvPicPr>
-        <p:blipFill>
-          <a:blip r:embed="rId5"/>
-          <a:stretch>
-            <a:fillRect/>
-          </a:stretch>
-        </p:blipFill>
-        <p:spPr>
-          <a:xfrm>
-            <a:off x="6894243" y="1471205"/>
-            <a:ext cx="3586989" cy="609112"/>
-          </a:xfrm>
-          <a:prstGeom prst="rect">
-            <a:avLst/>
-          </a:prstGeom>
-        </p:spPr>
-      </p:pic>
-      <p:pic>
-        <p:nvPicPr>
-          <p:cNvPr id="13" name="그림 12">
-            <a:extLst>
-              <a:ext uri="{FF2B5EF4-FFF2-40B4-BE49-F238E27FC236}">
-                <a16:creationId xmlns:a16="http://schemas.microsoft.com/office/drawing/2014/main" id="{E9B04E76-9F8F-8123-92F3-079E558C11DC}"/>
-              </a:ext>
-            </a:extLst>
-          </p:cNvPr>
-          <p:cNvPicPr>
-            <a:picLocks noChangeAspect="1"/>
-          </p:cNvPicPr>
-          <p:nvPr/>
-        </p:nvPicPr>
-        <p:blipFill>
-          <a:blip r:embed="rId6"/>
-          <a:stretch>
-            <a:fillRect/>
-          </a:stretch>
-        </p:blipFill>
-        <p:spPr>
-          <a:xfrm>
-            <a:off x="6598932" y="2320933"/>
-            <a:ext cx="4177610" cy="453715"/>
-          </a:xfrm>
-          <a:prstGeom prst="rect">
-            <a:avLst/>
-          </a:prstGeom>
-        </p:spPr>
-      </p:pic>
-      <p:pic>
-        <p:nvPicPr>
-          <p:cNvPr id="17" name="그림 16">
-            <a:extLst>
-              <a:ext uri="{FF2B5EF4-FFF2-40B4-BE49-F238E27FC236}">
-                <a16:creationId xmlns:a16="http://schemas.microsoft.com/office/drawing/2014/main" id="{2D292B5B-5F40-CCD6-3B16-7E2033CC8241}"/>
-              </a:ext>
-            </a:extLst>
-          </p:cNvPr>
-          <p:cNvPicPr>
-            <a:picLocks noChangeAspect="1"/>
-          </p:cNvPicPr>
-          <p:nvPr/>
-        </p:nvPicPr>
-        <p:blipFill>
-          <a:blip r:embed="rId7"/>
-          <a:stretch>
-            <a:fillRect/>
-          </a:stretch>
-        </p:blipFill>
-        <p:spPr>
-          <a:xfrm>
-            <a:off x="7172477" y="3053258"/>
-            <a:ext cx="3030520" cy="2616595"/>
-          </a:xfrm>
-          <a:prstGeom prst="rect">
-            <a:avLst/>
-          </a:prstGeom>
-        </p:spPr>
-      </p:pic>
-      <p:pic>
-        <p:nvPicPr>
-          <p:cNvPr id="21" name="그림 20">
-            <a:extLst>
-              <a:ext uri="{FF2B5EF4-FFF2-40B4-BE49-F238E27FC236}">
-                <a16:creationId xmlns:a16="http://schemas.microsoft.com/office/drawing/2014/main" id="{6AE11BB2-E9F0-3F6B-80A1-1C7B0ACA7ADD}"/>
-              </a:ext>
-            </a:extLst>
-          </p:cNvPr>
-          <p:cNvPicPr>
-            <a:picLocks noChangeAspect="1"/>
-          </p:cNvPicPr>
-          <p:nvPr/>
-        </p:nvPicPr>
-        <p:blipFill>
-          <a:blip r:embed="rId8"/>
-          <a:stretch>
-            <a:fillRect/>
-          </a:stretch>
-        </p:blipFill>
-        <p:spPr>
-          <a:xfrm>
-            <a:off x="7172477" y="5710678"/>
-            <a:ext cx="1954942" cy="119819"/>
-          </a:xfrm>
-          <a:prstGeom prst="rect">
-            <a:avLst/>
-          </a:prstGeom>
-        </p:spPr>
-      </p:pic>
-      <p:sp>
-        <p:nvSpPr>
-          <p:cNvPr id="25" name="TextBox 24">
-            <a:extLst>
-              <a:ext uri="{FF2B5EF4-FFF2-40B4-BE49-F238E27FC236}">
-                <a16:creationId xmlns:a16="http://schemas.microsoft.com/office/drawing/2014/main" id="{03875278-A554-CE9C-20F8-143C0D95E4F7}"/>
-              </a:ext>
-            </a:extLst>
-          </p:cNvPr>
-          <p:cNvSpPr txBox="1"/>
-          <p:nvPr/>
-        </p:nvSpPr>
-        <p:spPr>
-          <a:xfrm>
-            <a:off x="6598932" y="5871322"/>
-            <a:ext cx="3700444" cy="246221"/>
-          </a:xfrm>
-          <a:prstGeom prst="rect">
-            <a:avLst/>
-          </a:prstGeom>
-          <a:noFill/>
-        </p:spPr>
-        <p:txBody>
-          <a:bodyPr wrap="square">
-            <a:spAutoFit/>
-          </a:bodyPr>
-          <a:lstStyle/>
-          <a:p>
-            <a:r>
-              <a:rPr lang="ko-KR" altLang="en-US" sz="1000" dirty="0"/>
-              <a:t>https://www.hkbs.co.kr/news/articleView.html?idxno=804038</a:t>
-            </a:r>
-          </a:p>
-        </p:txBody>
-      </p:sp>
-      <p:sp>
-        <p:nvSpPr>
-          <p:cNvPr id="28" name="TextBox 27">
-            <a:extLst>
-              <a:ext uri="{FF2B5EF4-FFF2-40B4-BE49-F238E27FC236}">
-                <a16:creationId xmlns:a16="http://schemas.microsoft.com/office/drawing/2014/main" id="{9DDB3B96-68CD-FDF1-D479-81B84E9D4298}"/>
-              </a:ext>
-            </a:extLst>
-          </p:cNvPr>
-          <p:cNvSpPr txBox="1"/>
-          <p:nvPr/>
-        </p:nvSpPr>
-        <p:spPr>
-          <a:xfrm>
-            <a:off x="637492" y="5871323"/>
-            <a:ext cx="3700444" cy="246221"/>
-          </a:xfrm>
-          <a:prstGeom prst="rect">
-            <a:avLst/>
-          </a:prstGeom>
-          <a:noFill/>
-        </p:spPr>
-        <p:txBody>
-          <a:bodyPr wrap="square">
-            <a:spAutoFit/>
-          </a:bodyPr>
-          <a:lstStyle/>
-          <a:p>
-            <a:r>
-              <a:rPr lang="ko-KR" altLang="en-US" sz="1000" dirty="0"/>
-              <a:t>https://www.hkbs.co.kr/news/articleView.html?idxno=804644</a:t>
-            </a:r>
-          </a:p>
-        </p:txBody>
-      </p:sp>
-    </p:spTree>
-    <p:extLst>
-      <p:ext uri="{BB962C8B-B14F-4D97-AF65-F5344CB8AC3E}">
-        <p14:creationId xmlns:p14="http://schemas.microsoft.com/office/powerpoint/2010/main" val="633511603"/>
-      </p:ext>
-    </p:extLst>
-  </p:cSld>
-  <p:clrMapOvr>
-    <a:masterClrMapping/>
-  </p:clrMapOvr>
-</p:sld>
-</file>
-
-<file path=ppt/slides/slide26.xml><?xml version="1.0" encoding="utf-8"?>
-<p:sld xmlns:a="http://schemas.openxmlformats.org/drawingml/2006/main" xmlns:r="http://schemas.openxmlformats.org/officeDocument/2006/relationships" xmlns:p="http://schemas.openxmlformats.org/presentationml/2006/main">
-  <p:cSld>
-    <p:spTree>
-      <p:nvGrpSpPr>
-        <p:cNvPr id="1" name=""/>
-        <p:cNvGrpSpPr/>
-        <p:nvPr/>
-      </p:nvGrpSpPr>
-      <p:grpSpPr>
-        <a:xfrm>
-          <a:off x="0" y="0"/>
-          <a:ext cx="0" cy="0"/>
-          <a:chOff x="0" y="0"/>
-          <a:chExt cx="0" cy="0"/>
-        </a:xfrm>
-      </p:grpSpPr>
-      <p:sp>
-        <p:nvSpPr>
-          <p:cNvPr id="2" name="제목 1">
-            <a:extLst>
-              <a:ext uri="{FF2B5EF4-FFF2-40B4-BE49-F238E27FC236}">
-                <a16:creationId xmlns:a16="http://schemas.microsoft.com/office/drawing/2014/main" id="{AF929B47-9E1B-F3E3-185D-5263F51E72AE}"/>
-              </a:ext>
-            </a:extLst>
-          </p:cNvPr>
-          <p:cNvSpPr>
-            <a:spLocks noGrp="1"/>
-          </p:cNvSpPr>
-          <p:nvPr>
-            <p:ph type="title"/>
-          </p:nvPr>
-        </p:nvSpPr>
-        <p:spPr/>
-        <p:txBody>
-          <a:bodyPr/>
-          <a:lstStyle/>
-          <a:p>
-            <a:r>
-              <a:rPr lang="ko-KR" altLang="en-US" dirty="0"/>
-              <a:t>환경경제학에서 다루는 여러가지 주제들</a:t>
-            </a:r>
-          </a:p>
-        </p:txBody>
-      </p:sp>
-      <p:sp>
-        <p:nvSpPr>
-          <p:cNvPr id="4" name="슬라이드 번호 개체 틀 3">
-            <a:extLst>
-              <a:ext uri="{FF2B5EF4-FFF2-40B4-BE49-F238E27FC236}">
-                <a16:creationId xmlns:a16="http://schemas.microsoft.com/office/drawing/2014/main" id="{C5C868A8-2336-891D-8F8F-AE72C84AC22B}"/>
-              </a:ext>
-            </a:extLst>
-          </p:cNvPr>
-          <p:cNvSpPr>
-            <a:spLocks noGrp="1"/>
-          </p:cNvSpPr>
-          <p:nvPr>
-            <p:ph type="sldNum" sz="quarter" idx="12"/>
-          </p:nvPr>
-        </p:nvSpPr>
-        <p:spPr/>
-        <p:txBody>
-          <a:bodyPr/>
-          <a:lstStyle/>
-          <a:p>
-            <a:fld id="{109C872D-39A9-4065-8BF3-6A613116E2A1}" type="slidenum">
-              <a:rPr lang="ko-KR" altLang="en-US" smtClean="0"/>
-              <a:t>26</a:t>
-            </a:fld>
-            <a:endParaRPr lang="ko-KR" altLang="en-US"/>
-          </a:p>
-        </p:txBody>
-      </p:sp>
-      <p:sp>
-        <p:nvSpPr>
-          <p:cNvPr id="8" name="TextBox 7">
-            <a:extLst>
-              <a:ext uri="{FF2B5EF4-FFF2-40B4-BE49-F238E27FC236}">
-                <a16:creationId xmlns:a16="http://schemas.microsoft.com/office/drawing/2014/main" id="{DFD268C5-C989-3549-0B43-DF1B4C75EF8B}"/>
-              </a:ext>
-            </a:extLst>
-          </p:cNvPr>
-          <p:cNvSpPr txBox="1"/>
-          <p:nvPr/>
-        </p:nvSpPr>
-        <p:spPr>
-          <a:xfrm>
-            <a:off x="760154" y="2810425"/>
-            <a:ext cx="3353282" cy="230832"/>
-          </a:xfrm>
-          <a:prstGeom prst="rect">
-            <a:avLst/>
-          </a:prstGeom>
-          <a:noFill/>
-        </p:spPr>
-        <p:txBody>
-          <a:bodyPr wrap="square">
-            <a:spAutoFit/>
-          </a:bodyPr>
-          <a:lstStyle/>
-          <a:p>
-            <a:r>
-              <a:rPr lang="ko-KR" altLang="en-US" sz="900" dirty="0"/>
-              <a:t>https://www.hkbs.co.kr/news/articleView.html?idxno=804655</a:t>
-            </a:r>
-          </a:p>
-        </p:txBody>
-      </p:sp>
-      <p:pic>
-        <p:nvPicPr>
-          <p:cNvPr id="16" name="그림 15">
-            <a:extLst>
-              <a:ext uri="{FF2B5EF4-FFF2-40B4-BE49-F238E27FC236}">
-                <a16:creationId xmlns:a16="http://schemas.microsoft.com/office/drawing/2014/main" id="{3916BF2E-1455-4C55-8A3B-1182287ED099}"/>
-              </a:ext>
-            </a:extLst>
-          </p:cNvPr>
-          <p:cNvPicPr>
-            <a:picLocks noChangeAspect="1"/>
-          </p:cNvPicPr>
-          <p:nvPr/>
-        </p:nvPicPr>
-        <p:blipFill>
-          <a:blip r:embed="rId2"/>
-          <a:stretch>
-            <a:fillRect/>
-          </a:stretch>
-        </p:blipFill>
-        <p:spPr>
-          <a:xfrm>
-            <a:off x="759393" y="1499001"/>
-            <a:ext cx="3924000" cy="592529"/>
-          </a:xfrm>
-          <a:prstGeom prst="rect">
-            <a:avLst/>
-          </a:prstGeom>
-        </p:spPr>
-      </p:pic>
-      <p:pic>
-        <p:nvPicPr>
-          <p:cNvPr id="18" name="그림 17">
-            <a:extLst>
-              <a:ext uri="{FF2B5EF4-FFF2-40B4-BE49-F238E27FC236}">
-                <a16:creationId xmlns:a16="http://schemas.microsoft.com/office/drawing/2014/main" id="{7DECB40D-05B0-AB95-FFCB-6ED6297EF486}"/>
-              </a:ext>
-            </a:extLst>
-          </p:cNvPr>
-          <p:cNvPicPr>
-            <a:picLocks noChangeAspect="1"/>
-          </p:cNvPicPr>
-          <p:nvPr/>
-        </p:nvPicPr>
-        <p:blipFill>
-          <a:blip r:embed="rId3"/>
-          <a:stretch>
-            <a:fillRect/>
-          </a:stretch>
-        </p:blipFill>
-        <p:spPr>
-          <a:xfrm>
-            <a:off x="904537" y="2374266"/>
-            <a:ext cx="3832106" cy="376010"/>
-          </a:xfrm>
-          <a:prstGeom prst="rect">
-            <a:avLst/>
-          </a:prstGeom>
-        </p:spPr>
-      </p:pic>
-      <p:pic>
-        <p:nvPicPr>
-          <p:cNvPr id="32" name="그림 31">
-            <a:extLst>
-              <a:ext uri="{FF2B5EF4-FFF2-40B4-BE49-F238E27FC236}">
-                <a16:creationId xmlns:a16="http://schemas.microsoft.com/office/drawing/2014/main" id="{B6422AC2-748B-D00C-6ADC-53A0347030B6}"/>
-              </a:ext>
-            </a:extLst>
-          </p:cNvPr>
-          <p:cNvPicPr>
-            <a:picLocks noChangeAspect="1"/>
-          </p:cNvPicPr>
-          <p:nvPr/>
-        </p:nvPicPr>
-        <p:blipFill>
-          <a:blip r:embed="rId4"/>
-          <a:stretch>
-            <a:fillRect/>
-          </a:stretch>
-        </p:blipFill>
-        <p:spPr>
-          <a:xfrm>
-            <a:off x="5789364" y="1458167"/>
-            <a:ext cx="5431569" cy="633363"/>
-          </a:xfrm>
-          <a:prstGeom prst="rect">
-            <a:avLst/>
-          </a:prstGeom>
-        </p:spPr>
-      </p:pic>
-      <p:pic>
-        <p:nvPicPr>
-          <p:cNvPr id="33" name="그림 32">
-            <a:extLst>
-              <a:ext uri="{FF2B5EF4-FFF2-40B4-BE49-F238E27FC236}">
-                <a16:creationId xmlns:a16="http://schemas.microsoft.com/office/drawing/2014/main" id="{6DCFEB51-EB59-2A33-B48A-62AB199052B0}"/>
-              </a:ext>
-            </a:extLst>
-          </p:cNvPr>
-          <p:cNvPicPr>
-            <a:picLocks noChangeAspect="1"/>
-          </p:cNvPicPr>
-          <p:nvPr/>
-        </p:nvPicPr>
-        <p:blipFill>
-          <a:blip r:embed="rId5"/>
-          <a:stretch>
-            <a:fillRect/>
-          </a:stretch>
-        </p:blipFill>
-        <p:spPr>
-          <a:xfrm>
-            <a:off x="5789364" y="2290177"/>
-            <a:ext cx="4598470" cy="373055"/>
-          </a:xfrm>
-          <a:prstGeom prst="rect">
-            <a:avLst/>
-          </a:prstGeom>
-        </p:spPr>
-      </p:pic>
-      <p:pic>
-        <p:nvPicPr>
-          <p:cNvPr id="34" name="그림 33">
-            <a:extLst>
-              <a:ext uri="{FF2B5EF4-FFF2-40B4-BE49-F238E27FC236}">
-                <a16:creationId xmlns:a16="http://schemas.microsoft.com/office/drawing/2014/main" id="{0CAE3199-B49D-3932-B382-F9E8D7D03ED0}"/>
-              </a:ext>
-            </a:extLst>
-          </p:cNvPr>
-          <p:cNvPicPr>
-            <a:picLocks noChangeAspect="1"/>
-          </p:cNvPicPr>
-          <p:nvPr/>
-        </p:nvPicPr>
-        <p:blipFill>
-          <a:blip r:embed="rId6"/>
-          <a:stretch>
-            <a:fillRect/>
-          </a:stretch>
-        </p:blipFill>
-        <p:spPr>
-          <a:xfrm>
-            <a:off x="6300262" y="3071473"/>
-            <a:ext cx="3576673" cy="2660290"/>
-          </a:xfrm>
-          <a:prstGeom prst="rect">
-            <a:avLst/>
-          </a:prstGeom>
-        </p:spPr>
-      </p:pic>
-      <p:sp>
-        <p:nvSpPr>
-          <p:cNvPr id="35" name="TextBox 34">
-            <a:extLst>
-              <a:ext uri="{FF2B5EF4-FFF2-40B4-BE49-F238E27FC236}">
-                <a16:creationId xmlns:a16="http://schemas.microsoft.com/office/drawing/2014/main" id="{FB58ADB1-42EC-8C2C-22FB-0B23AC24D216}"/>
-              </a:ext>
-            </a:extLst>
-          </p:cNvPr>
-          <p:cNvSpPr txBox="1"/>
-          <p:nvPr/>
-        </p:nvSpPr>
-        <p:spPr>
-          <a:xfrm>
-            <a:off x="5790063" y="5871323"/>
-            <a:ext cx="3700444" cy="246221"/>
-          </a:xfrm>
-          <a:prstGeom prst="rect">
-            <a:avLst/>
-          </a:prstGeom>
-          <a:noFill/>
-        </p:spPr>
-        <p:txBody>
-          <a:bodyPr wrap="square">
-            <a:spAutoFit/>
-          </a:bodyPr>
-          <a:lstStyle/>
-          <a:p>
-            <a:r>
-              <a:rPr lang="en-US" altLang="ko-KR" sz="1000" dirty="0"/>
-              <a:t>https://www.hkbs.co.kr/news/articleView.html?idxno=804652</a:t>
-            </a:r>
-            <a:endParaRPr lang="ko-KR" altLang="en-US" sz="1000" dirty="0"/>
-          </a:p>
-        </p:txBody>
-      </p:sp>
-      <p:pic>
-        <p:nvPicPr>
-          <p:cNvPr id="38" name="그림 37">
-            <a:extLst>
-              <a:ext uri="{FF2B5EF4-FFF2-40B4-BE49-F238E27FC236}">
-                <a16:creationId xmlns:a16="http://schemas.microsoft.com/office/drawing/2014/main" id="{F8135016-2B32-1E91-35CB-6421555E8791}"/>
-              </a:ext>
-            </a:extLst>
-          </p:cNvPr>
-          <p:cNvPicPr>
-            <a:picLocks noChangeAspect="1"/>
-          </p:cNvPicPr>
-          <p:nvPr/>
-        </p:nvPicPr>
-        <p:blipFill>
-          <a:blip r:embed="rId7"/>
-          <a:stretch>
-            <a:fillRect/>
-          </a:stretch>
-        </p:blipFill>
-        <p:spPr>
-          <a:xfrm>
-            <a:off x="904537" y="3429000"/>
-            <a:ext cx="3753956" cy="2612227"/>
-          </a:xfrm>
-          <a:prstGeom prst="rect">
-            <a:avLst/>
-          </a:prstGeom>
-        </p:spPr>
-      </p:pic>
-    </p:spTree>
-    <p:extLst>
-      <p:ext uri="{BB962C8B-B14F-4D97-AF65-F5344CB8AC3E}">
-        <p14:creationId xmlns:p14="http://schemas.microsoft.com/office/powerpoint/2010/main" val="3041799588"/>
-      </p:ext>
-    </p:extLst>
-  </p:cSld>
-  <p:clrMapOvr>
-    <a:masterClrMapping/>
-  </p:clrMapOvr>
-</p:sld>
-</file>
-
-<file path=ppt/slides/slide27.xml><?xml version="1.0" encoding="utf-8"?>
-<p:sld xmlns:a="http://schemas.openxmlformats.org/drawingml/2006/main" xmlns:r="http://schemas.openxmlformats.org/officeDocument/2006/relationships" xmlns:p="http://schemas.openxmlformats.org/presentationml/2006/main">
-  <p:cSld>
-    <p:spTree>
-      <p:nvGrpSpPr>
-        <p:cNvPr id="1" name=""/>
-        <p:cNvGrpSpPr/>
-        <p:nvPr/>
-      </p:nvGrpSpPr>
-      <p:grpSpPr>
-        <a:xfrm>
-          <a:off x="0" y="0"/>
-          <a:ext cx="0" cy="0"/>
-          <a:chOff x="0" y="0"/>
-          <a:chExt cx="0" cy="0"/>
-        </a:xfrm>
-      </p:grpSpPr>
-      <p:sp>
-        <p:nvSpPr>
-          <p:cNvPr id="2" name="제목 1">
-            <a:extLst>
-              <a:ext uri="{FF2B5EF4-FFF2-40B4-BE49-F238E27FC236}">
-                <a16:creationId xmlns:a16="http://schemas.microsoft.com/office/drawing/2014/main" id="{8750A8A9-B3F6-9EF9-EA26-931E0C929D9F}"/>
-              </a:ext>
-            </a:extLst>
-          </p:cNvPr>
-          <p:cNvSpPr>
-            <a:spLocks noGrp="1"/>
-          </p:cNvSpPr>
-          <p:nvPr>
-            <p:ph type="title"/>
-          </p:nvPr>
-        </p:nvSpPr>
-        <p:spPr/>
-        <p:txBody>
-          <a:bodyPr/>
-          <a:lstStyle/>
-          <a:p>
-            <a:r>
-              <a:rPr lang="ko-KR" altLang="en-US" dirty="0"/>
-              <a:t>생활 속의 환경경제</a:t>
-            </a:r>
-          </a:p>
-        </p:txBody>
-      </p:sp>
-      <p:sp>
-        <p:nvSpPr>
-          <p:cNvPr id="4" name="슬라이드 번호 개체 틀 3">
-            <a:extLst>
-              <a:ext uri="{FF2B5EF4-FFF2-40B4-BE49-F238E27FC236}">
-                <a16:creationId xmlns:a16="http://schemas.microsoft.com/office/drawing/2014/main" id="{DAEF89B1-62CE-5B0A-BF11-F8747552BC90}"/>
-              </a:ext>
-            </a:extLst>
-          </p:cNvPr>
-          <p:cNvSpPr>
-            <a:spLocks noGrp="1"/>
-          </p:cNvSpPr>
-          <p:nvPr>
-            <p:ph type="sldNum" sz="quarter" idx="12"/>
-          </p:nvPr>
-        </p:nvSpPr>
-        <p:spPr/>
-        <p:txBody>
-          <a:bodyPr/>
-          <a:lstStyle/>
-          <a:p>
-            <a:fld id="{109C872D-39A9-4065-8BF3-6A613116E2A1}" type="slidenum">
-              <a:rPr lang="ko-KR" altLang="en-US" smtClean="0"/>
-              <a:t>27</a:t>
-            </a:fld>
-            <a:endParaRPr lang="ko-KR" altLang="en-US"/>
-          </a:p>
-        </p:txBody>
-      </p:sp>
-      <p:sp>
-        <p:nvSpPr>
-          <p:cNvPr id="5" name="TextBox 4">
-            <a:extLst>
-              <a:ext uri="{FF2B5EF4-FFF2-40B4-BE49-F238E27FC236}">
-                <a16:creationId xmlns:a16="http://schemas.microsoft.com/office/drawing/2014/main" id="{60B20294-E052-C62E-3DBC-73718D3A05CD}"/>
-              </a:ext>
-            </a:extLst>
-          </p:cNvPr>
-          <p:cNvSpPr txBox="1"/>
-          <p:nvPr/>
-        </p:nvSpPr>
-        <p:spPr>
-          <a:xfrm>
-            <a:off x="678872" y="1038536"/>
-            <a:ext cx="10975831" cy="5215338"/>
-          </a:xfrm>
-          <a:prstGeom prst="rect">
-            <a:avLst/>
-          </a:prstGeom>
-          <a:noFill/>
-        </p:spPr>
-        <p:txBody>
-          <a:bodyPr wrap="square" rtlCol="0" anchor="t">
-            <a:spAutoFit/>
-          </a:bodyPr>
-          <a:lstStyle/>
-          <a:p>
-            <a:pPr>
-              <a:lnSpc>
-                <a:spcPct val="150000"/>
-              </a:lnSpc>
-            </a:pPr>
-            <a:r>
-              <a:rPr lang="ko-KR" altLang="en-US" u="sng" dirty="0">
-                <a:ln w="3175">
-                  <a:noFill/>
-                </a:ln>
-                <a:latin typeface="HY헤드라인M" panose="02030600000101010101" pitchFamily="18" charset="-127"/>
-                <a:ea typeface="HY헤드라인M" panose="02030600000101010101" pitchFamily="18" charset="-127"/>
-              </a:rPr>
-              <a:t>쓰레기 종량제</a:t>
-            </a:r>
-            <a:endParaRPr lang="en-US" altLang="ko-KR" u="sng" dirty="0">
-              <a:ln w="3175">
-                <a:noFill/>
-              </a:ln>
-              <a:latin typeface="HY헤드라인M" panose="02030600000101010101" pitchFamily="18" charset="-127"/>
-              <a:ea typeface="HY헤드라인M" panose="02030600000101010101" pitchFamily="18" charset="-127"/>
-            </a:endParaRPr>
-          </a:p>
-          <a:p>
-            <a:pPr>
-              <a:lnSpc>
-                <a:spcPct val="150000"/>
-              </a:lnSpc>
-            </a:pPr>
-            <a:endParaRPr lang="en-US" altLang="ko-KR" sz="400" u="sng" dirty="0">
-              <a:ln w="3175">
-                <a:noFill/>
-              </a:ln>
-              <a:latin typeface="HY헤드라인M" panose="02030600000101010101" pitchFamily="18" charset="-127"/>
-              <a:ea typeface="HY헤드라인M" panose="02030600000101010101" pitchFamily="18" charset="-127"/>
-            </a:endParaRPr>
-          </a:p>
-          <a:p>
-            <a:pPr marL="377825" indent="-285750">
-              <a:lnSpc>
-                <a:spcPct val="150000"/>
-              </a:lnSpc>
-              <a:buFont typeface="Arial" panose="020B0604020202020204" pitchFamily="34" charset="0"/>
-              <a:buChar char="•"/>
-            </a:pPr>
-            <a:r>
-              <a:rPr lang="en-US" altLang="ko-KR" sz="1600" spc="-50" dirty="0"/>
-              <a:t>1995</a:t>
-            </a:r>
-            <a:r>
-              <a:rPr lang="ko-KR" altLang="en-US" sz="1600" spc="-50" dirty="0"/>
-              <a:t>년 이전에는 건물면적 혹은 재산세 납부액에 비례하여 쓰레기 수거료를 납부하는 방식</a:t>
-            </a:r>
-            <a:r>
-              <a:rPr lang="en-US" altLang="ko-KR" sz="1600" spc="-50" dirty="0"/>
-              <a:t>.</a:t>
-            </a:r>
-          </a:p>
-          <a:p>
-            <a:pPr marL="835025" lvl="1" indent="-285750">
-              <a:lnSpc>
-                <a:spcPct val="150000"/>
-              </a:lnSpc>
-              <a:buFont typeface="Wingdings" panose="05000000000000000000" pitchFamily="2" charset="2"/>
-              <a:buChar char="ü"/>
-            </a:pPr>
-            <a:r>
-              <a:rPr lang="ko-KR" altLang="en-US" sz="1600" spc="-50" dirty="0"/>
-              <a:t>쓰레기 배출량을 줄여야할 경제적 유인이 없음</a:t>
-            </a:r>
-            <a:r>
-              <a:rPr lang="en-US" altLang="ko-KR" sz="1600" spc="-50" dirty="0"/>
-              <a:t>.</a:t>
-            </a:r>
-          </a:p>
-          <a:p>
-            <a:pPr marL="377825" indent="-285750">
-              <a:lnSpc>
-                <a:spcPct val="150000"/>
-              </a:lnSpc>
-              <a:buFont typeface="Arial" panose="020B0604020202020204" pitchFamily="34" charset="0"/>
-              <a:buChar char="•"/>
-            </a:pPr>
-            <a:r>
-              <a:rPr lang="en-US" altLang="ko-KR" sz="1600" spc="-50" dirty="0"/>
-              <a:t>1995</a:t>
-            </a:r>
-            <a:r>
-              <a:rPr lang="ko-KR" altLang="en-US" sz="1600" spc="-50" dirty="0"/>
-              <a:t>년 이후로 쓰레기 종량제 도입</a:t>
-            </a:r>
-            <a:r>
-              <a:rPr lang="en-US" altLang="ko-KR" sz="1600" spc="-50" dirty="0"/>
-              <a:t>. </a:t>
-            </a:r>
-            <a:r>
-              <a:rPr lang="ko-KR" altLang="en-US" sz="1600" spc="-50" dirty="0"/>
-              <a:t>일반쓰레기를 배출할 때에는 종량제 봉투를 사용하는 방식</a:t>
-            </a:r>
-            <a:endParaRPr lang="en-US" altLang="ko-KR" sz="1600" spc="-50" dirty="0"/>
-          </a:p>
-          <a:p>
-            <a:pPr marL="835025" lvl="1" indent="-285750">
-              <a:lnSpc>
-                <a:spcPct val="150000"/>
-              </a:lnSpc>
-              <a:buFont typeface="Wingdings" panose="05000000000000000000" pitchFamily="2" charset="2"/>
-              <a:buChar char="ü"/>
-            </a:pPr>
-            <a:r>
-              <a:rPr lang="ko-KR" altLang="en-US" sz="1600" spc="-50" dirty="0"/>
-              <a:t>쓰레기 배출량과 처리비용 </a:t>
-            </a:r>
-            <a:r>
-              <a:rPr lang="en-US" altLang="ko-KR" sz="1600" spc="-50" dirty="0"/>
-              <a:t>(</a:t>
-            </a:r>
-            <a:r>
-              <a:rPr lang="ko-KR" altLang="en-US" sz="1600" spc="-50" dirty="0" err="1"/>
-              <a:t>종량제봉투</a:t>
-            </a:r>
-            <a:r>
-              <a:rPr lang="ko-KR" altLang="en-US" sz="1600" spc="-50" dirty="0"/>
-              <a:t> 구매비용</a:t>
-            </a:r>
-            <a:r>
-              <a:rPr lang="en-US" altLang="ko-KR" sz="1600" spc="-50" dirty="0"/>
-              <a:t>)</a:t>
-            </a:r>
-            <a:r>
-              <a:rPr lang="ko-KR" altLang="en-US" sz="1600" spc="-50" dirty="0"/>
-              <a:t>이 비례하므로</a:t>
-            </a:r>
-            <a:r>
-              <a:rPr lang="en-US" altLang="ko-KR" sz="1600" spc="-50" dirty="0"/>
-              <a:t>, </a:t>
-            </a:r>
-            <a:r>
-              <a:rPr lang="ko-KR" altLang="en-US" sz="1600" spc="-50" dirty="0"/>
-              <a:t>쓰레기를 줄여야 하는 경제적 유인이 존재</a:t>
-            </a:r>
-            <a:r>
-              <a:rPr lang="en-US" altLang="ko-KR" sz="1600" spc="-50" dirty="0"/>
-              <a:t>.</a:t>
-            </a:r>
-          </a:p>
-          <a:p>
-            <a:pPr marL="92075">
-              <a:lnSpc>
-                <a:spcPct val="150000"/>
-              </a:lnSpc>
-            </a:pPr>
-            <a:endParaRPr lang="en-US" altLang="ko-KR" sz="1600" u="sng" spc="-50" dirty="0">
-              <a:ln w="3175">
-                <a:noFill/>
-              </a:ln>
-              <a:latin typeface="HY헤드라인M" panose="02030600000101010101" pitchFamily="18" charset="-127"/>
-              <a:ea typeface="HY헤드라인M" panose="02030600000101010101" pitchFamily="18" charset="-127"/>
-            </a:endParaRPr>
-          </a:p>
-          <a:p>
-            <a:pPr>
-              <a:lnSpc>
-                <a:spcPct val="150000"/>
-              </a:lnSpc>
-            </a:pPr>
-            <a:r>
-              <a:rPr lang="ko-KR" altLang="en-US" u="sng" dirty="0">
-                <a:ln w="3175">
-                  <a:noFill/>
-                </a:ln>
-                <a:latin typeface="HY헤드라인M" panose="02030600000101010101" pitchFamily="18" charset="-127"/>
-                <a:ea typeface="HY헤드라인M" panose="02030600000101010101" pitchFamily="18" charset="-127"/>
-              </a:rPr>
-              <a:t>생산자 책임 재활용제도</a:t>
-            </a:r>
-            <a:endParaRPr lang="en-US" altLang="ko-KR" sz="400" u="sng" dirty="0">
-              <a:ln w="3175">
-                <a:noFill/>
-              </a:ln>
-              <a:latin typeface="HY헤드라인M" panose="02030600000101010101" pitchFamily="18" charset="-127"/>
-              <a:ea typeface="HY헤드라인M" panose="02030600000101010101" pitchFamily="18" charset="-127"/>
-            </a:endParaRPr>
-          </a:p>
-          <a:p>
-            <a:pPr marL="377825" indent="-285750">
-              <a:lnSpc>
-                <a:spcPct val="150000"/>
-              </a:lnSpc>
-              <a:buFont typeface="Arial" panose="020B0604020202020204" pitchFamily="34" charset="0"/>
-              <a:buChar char="•"/>
-            </a:pPr>
-            <a:r>
-              <a:rPr lang="ko-KR" altLang="en-US" sz="1600" spc="-50" dirty="0"/>
-              <a:t>제품 생산자나 포장재를 이용한 제품의 생산자에게 그 제품이나 포장재의 폐기물에 대하여 일정량의 재활용의무를 부여하여 재활용하게 하고</a:t>
-            </a:r>
-            <a:r>
-              <a:rPr lang="en-US" altLang="ko-KR" sz="1600" spc="-50" dirty="0"/>
-              <a:t>, </a:t>
-            </a:r>
-            <a:r>
-              <a:rPr lang="ko-KR" altLang="en-US" sz="1600" spc="-50" dirty="0"/>
-              <a:t>이를 이행하지 않을 경우 재활용에 소요되는 비용 이상의 재활용 부과금을 생산자에게 부과하는 제도</a:t>
-            </a:r>
-            <a:endParaRPr lang="en-US" altLang="ko-KR" sz="1600" spc="-50" dirty="0"/>
-          </a:p>
-          <a:p>
-            <a:pPr>
-              <a:lnSpc>
-                <a:spcPct val="150000"/>
-              </a:lnSpc>
-            </a:pPr>
-            <a:endParaRPr lang="en-US" altLang="ko-KR" u="sng" dirty="0">
-              <a:ln w="3175">
-                <a:noFill/>
-              </a:ln>
-              <a:latin typeface="HY헤드라인M" panose="02030600000101010101" pitchFamily="18" charset="-127"/>
-              <a:ea typeface="HY헤드라인M" panose="02030600000101010101" pitchFamily="18" charset="-127"/>
-            </a:endParaRPr>
-          </a:p>
-          <a:p>
-            <a:pPr>
-              <a:lnSpc>
-                <a:spcPct val="150000"/>
-              </a:lnSpc>
-            </a:pPr>
-            <a:r>
-              <a:rPr lang="ko-KR" altLang="en-US" u="sng" dirty="0">
-                <a:ln w="3175">
-                  <a:noFill/>
-                </a:ln>
-                <a:latin typeface="HY헤드라인M" panose="02030600000101010101" pitchFamily="18" charset="-127"/>
-                <a:ea typeface="HY헤드라인M" panose="02030600000101010101" pitchFamily="18" charset="-127"/>
-              </a:rPr>
-              <a:t>혼잡통행료</a:t>
-            </a:r>
-            <a:endParaRPr lang="en-US" altLang="ko-KR" u="sng" dirty="0">
-              <a:ln w="3175">
-                <a:noFill/>
-              </a:ln>
-              <a:latin typeface="HY헤드라인M" panose="02030600000101010101" pitchFamily="18" charset="-127"/>
-              <a:ea typeface="HY헤드라인M" panose="02030600000101010101" pitchFamily="18" charset="-127"/>
-            </a:endParaRPr>
-          </a:p>
-          <a:p>
-            <a:pPr>
-              <a:lnSpc>
-                <a:spcPct val="150000"/>
-              </a:lnSpc>
-            </a:pPr>
-            <a:endParaRPr lang="en-US" altLang="ko-KR" sz="400" u="sng" dirty="0">
-              <a:ln w="3175">
-                <a:noFill/>
-              </a:ln>
-              <a:latin typeface="HY헤드라인M" panose="02030600000101010101" pitchFamily="18" charset="-127"/>
-              <a:ea typeface="HY헤드라인M" panose="02030600000101010101" pitchFamily="18" charset="-127"/>
-            </a:endParaRPr>
-          </a:p>
-          <a:p>
-            <a:pPr marL="377825" indent="-285750">
-              <a:lnSpc>
-                <a:spcPct val="150000"/>
-              </a:lnSpc>
-              <a:buFont typeface="Arial" panose="020B0604020202020204" pitchFamily="34" charset="0"/>
-              <a:buChar char="•"/>
-            </a:pPr>
-            <a:r>
-              <a:rPr lang="ko-KR" altLang="en-US" sz="1600" spc="-50" dirty="0"/>
-              <a:t>자동차 운행의 증가는 도로 혼잡도를 높여 통행자의 시간 손실</a:t>
-            </a:r>
-            <a:r>
-              <a:rPr lang="en-US" altLang="ko-KR" sz="1600" spc="-50" dirty="0"/>
-              <a:t>, </a:t>
-            </a:r>
-            <a:r>
-              <a:rPr lang="ko-KR" altLang="en-US" sz="1600" spc="-50" dirty="0"/>
-              <a:t>연료 소비를 증가시킴</a:t>
-            </a:r>
-            <a:r>
-              <a:rPr lang="en-US" altLang="ko-KR" sz="1600" spc="-50" dirty="0"/>
-              <a:t>.</a:t>
-            </a:r>
-          </a:p>
-        </p:txBody>
-      </p:sp>
-    </p:spTree>
-    <p:extLst>
-      <p:ext uri="{BB962C8B-B14F-4D97-AF65-F5344CB8AC3E}">
-        <p14:creationId xmlns:p14="http://schemas.microsoft.com/office/powerpoint/2010/main" val="4080588902"/>
-      </p:ext>
-    </p:extLst>
-  </p:cSld>
-  <p:clrMapOvr>
-    <a:masterClrMapping/>
-  </p:clrMapOvr>
-</p:sld>
-</file>
-
-<file path=ppt/slides/slide28.xml><?xml version="1.0" encoding="utf-8"?>
-<p:sld xmlns:a="http://schemas.openxmlformats.org/drawingml/2006/main" xmlns:r="http://schemas.openxmlformats.org/officeDocument/2006/relationships" xmlns:p="http://schemas.openxmlformats.org/presentationml/2006/main">
-  <p:cSld>
-    <p:spTree>
-      <p:nvGrpSpPr>
-        <p:cNvPr id="1" name=""/>
-        <p:cNvGrpSpPr/>
-        <p:nvPr/>
-      </p:nvGrpSpPr>
-      <p:grpSpPr>
-        <a:xfrm>
-          <a:off x="0" y="0"/>
-          <a:ext cx="0" cy="0"/>
-          <a:chOff x="0" y="0"/>
-          <a:chExt cx="0" cy="0"/>
-        </a:xfrm>
-      </p:grpSpPr>
-      <p:sp>
-        <p:nvSpPr>
-          <p:cNvPr id="2" name="제목 1">
-            <a:extLst>
-              <a:ext uri="{FF2B5EF4-FFF2-40B4-BE49-F238E27FC236}">
-                <a16:creationId xmlns:a16="http://schemas.microsoft.com/office/drawing/2014/main" id="{775E0E3D-A421-11C5-7F28-25444AC14811}"/>
-              </a:ext>
-            </a:extLst>
-          </p:cNvPr>
-          <p:cNvSpPr>
-            <a:spLocks noGrp="1"/>
-          </p:cNvSpPr>
-          <p:nvPr>
-            <p:ph type="title"/>
-          </p:nvPr>
-        </p:nvSpPr>
-        <p:spPr/>
-        <p:txBody>
-          <a:bodyPr/>
-          <a:lstStyle/>
-          <a:p>
-            <a:r>
-              <a:rPr lang="ko-KR" altLang="en-US"/>
-              <a:t>환경경제학의 주요 주제</a:t>
-            </a:r>
-          </a:p>
-        </p:txBody>
-      </p:sp>
-      <p:sp>
-        <p:nvSpPr>
-          <p:cNvPr id="4" name="슬라이드 번호 개체 틀 3">
-            <a:extLst>
-              <a:ext uri="{FF2B5EF4-FFF2-40B4-BE49-F238E27FC236}">
-                <a16:creationId xmlns:a16="http://schemas.microsoft.com/office/drawing/2014/main" id="{8996A905-8541-5F7D-742D-17AB197F3D15}"/>
-              </a:ext>
-            </a:extLst>
-          </p:cNvPr>
-          <p:cNvSpPr>
-            <a:spLocks noGrp="1"/>
-          </p:cNvSpPr>
-          <p:nvPr>
-            <p:ph type="sldNum" sz="quarter" idx="12"/>
-          </p:nvPr>
-        </p:nvSpPr>
-        <p:spPr/>
-        <p:txBody>
-          <a:bodyPr/>
-          <a:lstStyle/>
-          <a:p>
-            <a:fld id="{109C872D-39A9-4065-8BF3-6A613116E2A1}" type="slidenum">
-              <a:rPr lang="ko-KR" altLang="en-US" smtClean="0"/>
-              <a:t>28</a:t>
-            </a:fld>
-            <a:endParaRPr lang="ko-KR" altLang="en-US"/>
-          </a:p>
-        </p:txBody>
-      </p:sp>
-      <p:sp>
-        <p:nvSpPr>
-          <p:cNvPr id="5" name="TextBox 4">
-            <a:extLst>
-              <a:ext uri="{FF2B5EF4-FFF2-40B4-BE49-F238E27FC236}">
-                <a16:creationId xmlns:a16="http://schemas.microsoft.com/office/drawing/2014/main" id="{A734423E-9AE5-ACFF-6BC7-AACA52353564}"/>
-              </a:ext>
-            </a:extLst>
-          </p:cNvPr>
-          <p:cNvSpPr txBox="1"/>
-          <p:nvPr/>
-        </p:nvSpPr>
-        <p:spPr>
-          <a:xfrm>
-            <a:off x="678872" y="1038536"/>
-            <a:ext cx="10975831" cy="4661341"/>
-          </a:xfrm>
-          <a:prstGeom prst="rect">
-            <a:avLst/>
-          </a:prstGeom>
-          <a:noFill/>
-        </p:spPr>
-        <p:txBody>
-          <a:bodyPr wrap="square" rtlCol="0" anchor="t">
-            <a:spAutoFit/>
-          </a:bodyPr>
-          <a:lstStyle/>
-          <a:p>
-            <a:pPr>
-              <a:lnSpc>
-                <a:spcPct val="150000"/>
-              </a:lnSpc>
-            </a:pPr>
-            <a:r>
-              <a:rPr lang="ko-KR" altLang="en-US" u="sng" dirty="0">
-                <a:ln w="3175">
-                  <a:noFill/>
-                </a:ln>
-                <a:latin typeface="HY헤드라인M" panose="02030600000101010101" pitchFamily="18" charset="-127"/>
-                <a:ea typeface="HY헤드라인M" panose="02030600000101010101" pitchFamily="18" charset="-127"/>
-              </a:rPr>
-              <a:t>시장실패와 외부효과</a:t>
-            </a:r>
-            <a:endParaRPr lang="en-US" altLang="ko-KR" u="sng" dirty="0">
-              <a:ln w="3175">
-                <a:noFill/>
-              </a:ln>
-              <a:latin typeface="HY헤드라인M" panose="02030600000101010101" pitchFamily="18" charset="-127"/>
-              <a:ea typeface="HY헤드라인M" panose="02030600000101010101" pitchFamily="18" charset="-127"/>
-            </a:endParaRPr>
-          </a:p>
-          <a:p>
-            <a:pPr>
-              <a:lnSpc>
-                <a:spcPct val="150000"/>
-              </a:lnSpc>
-            </a:pPr>
-            <a:endParaRPr lang="en-US" altLang="ko-KR" sz="400" u="sng" dirty="0">
-              <a:ln w="3175">
-                <a:noFill/>
-              </a:ln>
-              <a:latin typeface="HY헤드라인M" panose="02030600000101010101" pitchFamily="18" charset="-127"/>
-              <a:ea typeface="HY헤드라인M" panose="02030600000101010101" pitchFamily="18" charset="-127"/>
-            </a:endParaRPr>
-          </a:p>
-          <a:p>
-            <a:pPr marL="377825" indent="-285750">
-              <a:lnSpc>
-                <a:spcPct val="150000"/>
-              </a:lnSpc>
-              <a:buFont typeface="Arial" panose="020B0604020202020204" pitchFamily="34" charset="0"/>
-              <a:buChar char="•"/>
-            </a:pPr>
-            <a:r>
-              <a:rPr lang="en-US" altLang="ko-KR" sz="1600" b="1" spc="-50" dirty="0"/>
-              <a:t>(</a:t>
-            </a:r>
-            <a:r>
-              <a:rPr lang="ko-KR" altLang="en-US" sz="1600" b="1" spc="-50" dirty="0"/>
-              <a:t>공공재</a:t>
-            </a:r>
-            <a:r>
-              <a:rPr lang="en-US" altLang="ko-KR" sz="1600" b="1" spc="-50" dirty="0"/>
-              <a:t>)</a:t>
-            </a:r>
-            <a:r>
-              <a:rPr lang="en-US" altLang="ko-KR" sz="1600" spc="-50" dirty="0"/>
-              <a:t> </a:t>
-            </a:r>
-            <a:r>
-              <a:rPr lang="ko-KR" altLang="en-US" sz="1600" spc="-50" dirty="0"/>
-              <a:t>환경경제학에서 다루는 재화 및 서비스는 </a:t>
-            </a:r>
-            <a:r>
-              <a:rPr lang="ko-KR" altLang="en-US" sz="1600" b="1" spc="-50" dirty="0"/>
-              <a:t>공공재</a:t>
-            </a:r>
-            <a:r>
-              <a:rPr lang="ko-KR" altLang="en-US" sz="1600" spc="-50" dirty="0"/>
-              <a:t>의 성격이 강함</a:t>
-            </a:r>
-            <a:r>
-              <a:rPr lang="en-US" altLang="ko-KR" sz="1600" spc="-50" dirty="0"/>
-              <a:t>. </a:t>
-            </a:r>
-          </a:p>
-          <a:p>
-            <a:pPr marL="835025" lvl="1" indent="-285750">
-              <a:lnSpc>
-                <a:spcPct val="150000"/>
-              </a:lnSpc>
-              <a:buFont typeface="Wingdings" panose="05000000000000000000" pitchFamily="2" charset="2"/>
-              <a:buChar char="ü"/>
-            </a:pPr>
-            <a:r>
-              <a:rPr lang="ko-KR" altLang="en-US" sz="1600" spc="-50" dirty="0"/>
-              <a:t>소유권이 존재하지 않거나</a:t>
-            </a:r>
-            <a:r>
-              <a:rPr lang="en-US" altLang="ko-KR" sz="1600" spc="-50" dirty="0"/>
-              <a:t>, </a:t>
-            </a:r>
-            <a:r>
-              <a:rPr lang="ko-KR" altLang="en-US" sz="1600" spc="-50" dirty="0"/>
-              <a:t>개인이 아닌 집단에게 소유권이 부여된 환경자원이 많음</a:t>
-            </a:r>
-            <a:endParaRPr lang="en-US" altLang="ko-KR" sz="1600" spc="-50" dirty="0"/>
-          </a:p>
-          <a:p>
-            <a:pPr marL="377825" indent="-285750">
-              <a:lnSpc>
-                <a:spcPct val="150000"/>
-              </a:lnSpc>
-              <a:buFont typeface="Arial" panose="020B0604020202020204" pitchFamily="34" charset="0"/>
-              <a:buChar char="•"/>
-            </a:pPr>
-            <a:r>
-              <a:rPr lang="en-US" altLang="ko-KR" sz="1600" b="1" spc="-50" dirty="0"/>
-              <a:t>(</a:t>
-            </a:r>
-            <a:r>
-              <a:rPr lang="ko-KR" altLang="en-US" sz="1600" b="1" spc="-50" dirty="0"/>
-              <a:t>외부효과</a:t>
-            </a:r>
-            <a:r>
-              <a:rPr lang="en-US" altLang="ko-KR" sz="1600" b="1" spc="-50" dirty="0"/>
-              <a:t>) </a:t>
-            </a:r>
-            <a:r>
-              <a:rPr lang="ko-KR" altLang="en-US" sz="1600" spc="-50" dirty="0"/>
-              <a:t>경제주체의 행위가 제 </a:t>
-            </a:r>
-            <a:r>
-              <a:rPr lang="en-US" altLang="ko-KR" sz="1600" spc="-50" dirty="0"/>
-              <a:t>3</a:t>
-            </a:r>
-            <a:r>
-              <a:rPr lang="ko-KR" altLang="en-US" sz="1600" spc="-50" dirty="0"/>
-              <a:t>자에게 의도치 않은 이익이나 손해를 주지만</a:t>
-            </a:r>
-            <a:r>
-              <a:rPr lang="en-US" altLang="ko-KR" sz="1600" spc="-50" dirty="0"/>
-              <a:t>, </a:t>
-            </a:r>
-            <a:r>
-              <a:rPr lang="ko-KR" altLang="en-US" sz="1600" spc="-50" dirty="0"/>
-              <a:t>그 효과가 시장 가격에 반영되지 않음</a:t>
-            </a:r>
-            <a:r>
-              <a:rPr lang="en-US" altLang="ko-KR" sz="1600" spc="-50" dirty="0"/>
-              <a:t>.</a:t>
-            </a:r>
-          </a:p>
-          <a:p>
-            <a:pPr marL="835025" lvl="1" indent="-285750">
-              <a:lnSpc>
-                <a:spcPct val="150000"/>
-              </a:lnSpc>
-              <a:buFont typeface="Wingdings" panose="05000000000000000000" pitchFamily="2" charset="2"/>
-              <a:buChar char="ü"/>
-            </a:pPr>
-            <a:r>
-              <a:rPr lang="ko-KR" altLang="en-US" sz="1600" spc="-50" dirty="0"/>
-              <a:t>양봉업자가 키우는 벌들이 인근 과수원에 가서 꽃가루를 옮기며 꽃을 수분 시킴</a:t>
-            </a:r>
-            <a:r>
-              <a:rPr lang="en-US" altLang="ko-KR" sz="1600" spc="-50" dirty="0"/>
-              <a:t>. </a:t>
-            </a:r>
-            <a:r>
-              <a:rPr lang="ko-KR" altLang="en-US" sz="1600" spc="-50" dirty="0"/>
-              <a:t>이는 과수원 과일 생산량을 늘림</a:t>
-            </a:r>
-            <a:r>
-              <a:rPr lang="en-US" altLang="ko-KR" sz="1600" spc="-50" dirty="0"/>
-              <a:t>.</a:t>
-            </a:r>
-          </a:p>
-          <a:p>
-            <a:pPr marL="835025" lvl="1" indent="-285750">
-              <a:lnSpc>
-                <a:spcPct val="150000"/>
-              </a:lnSpc>
-              <a:buFont typeface="Wingdings" panose="05000000000000000000" pitchFamily="2" charset="2"/>
-              <a:buChar char="ü"/>
-            </a:pPr>
-            <a:r>
-              <a:rPr lang="ko-KR" altLang="en-US" sz="1600" spc="-50" dirty="0"/>
-              <a:t>공장에서 하천에 </a:t>
-            </a:r>
-            <a:r>
-              <a:rPr lang="ko-KR" altLang="en-US" sz="1600" spc="-50" dirty="0" err="1"/>
-              <a:t>오염수를</a:t>
-            </a:r>
-            <a:r>
-              <a:rPr lang="ko-KR" altLang="en-US" sz="1600" spc="-50" dirty="0"/>
-              <a:t> 방류해 하류 어업 종사자들이 피해를 입는 경우</a:t>
-            </a:r>
-            <a:endParaRPr lang="en-US" altLang="ko-KR" sz="1600" spc="-50" dirty="0"/>
-          </a:p>
-          <a:p>
-            <a:pPr marL="92075">
-              <a:lnSpc>
-                <a:spcPct val="150000"/>
-              </a:lnSpc>
-            </a:pPr>
-            <a:endParaRPr lang="en-US" altLang="ko-KR" sz="1600" u="sng" spc="-50" dirty="0">
-              <a:ln w="3175">
-                <a:noFill/>
-              </a:ln>
-              <a:latin typeface="HY헤드라인M" panose="02030600000101010101" pitchFamily="18" charset="-127"/>
-              <a:ea typeface="HY헤드라인M" panose="02030600000101010101" pitchFamily="18" charset="-127"/>
-            </a:endParaRPr>
-          </a:p>
-          <a:p>
-            <a:pPr>
-              <a:lnSpc>
-                <a:spcPct val="150000"/>
-              </a:lnSpc>
-            </a:pPr>
-            <a:r>
-              <a:rPr lang="ko-KR" altLang="en-US" u="sng" dirty="0">
-                <a:ln w="3175">
-                  <a:noFill/>
-                </a:ln>
-                <a:latin typeface="HY헤드라인M" panose="02030600000101010101" pitchFamily="18" charset="-127"/>
-                <a:ea typeface="HY헤드라인M" panose="02030600000101010101" pitchFamily="18" charset="-127"/>
-              </a:rPr>
-              <a:t>환경정책의 수립과 집행</a:t>
-            </a:r>
-            <a:endParaRPr lang="en-US" altLang="ko-KR" sz="400" u="sng" dirty="0">
-              <a:ln w="3175">
-                <a:noFill/>
-              </a:ln>
-              <a:latin typeface="HY헤드라인M" panose="02030600000101010101" pitchFamily="18" charset="-127"/>
-              <a:ea typeface="HY헤드라인M" panose="02030600000101010101" pitchFamily="18" charset="-127"/>
-            </a:endParaRPr>
-          </a:p>
-          <a:p>
-            <a:pPr marL="377825" indent="-285750">
-              <a:lnSpc>
-                <a:spcPct val="150000"/>
-              </a:lnSpc>
-              <a:buFont typeface="Arial" panose="020B0604020202020204" pitchFamily="34" charset="0"/>
-              <a:buChar char="•"/>
-            </a:pPr>
-            <a:r>
-              <a:rPr lang="ko-KR" altLang="en-US" sz="1600" spc="-50" dirty="0" err="1"/>
-              <a:t>환경재</a:t>
-            </a:r>
-            <a:r>
-              <a:rPr lang="ko-KR" altLang="en-US" sz="1600" spc="-50" dirty="0"/>
-              <a:t> 이용을 시장기능에 자율적으로 맡기면 환경피해가 커질 우려가 있음</a:t>
-            </a:r>
-            <a:r>
-              <a:rPr lang="en-US" altLang="ko-KR" sz="1600" spc="-50" dirty="0"/>
-              <a:t>.</a:t>
-            </a:r>
-          </a:p>
-          <a:p>
-            <a:pPr marL="377825" indent="-285750">
-              <a:lnSpc>
-                <a:spcPct val="150000"/>
-              </a:lnSpc>
-              <a:buFont typeface="Arial" panose="020B0604020202020204" pitchFamily="34" charset="0"/>
-              <a:buChar char="•"/>
-            </a:pPr>
-            <a:r>
-              <a:rPr lang="ko-KR" altLang="en-US" sz="1600" spc="-50" dirty="0"/>
-              <a:t>효율적인 </a:t>
-            </a:r>
-            <a:r>
-              <a:rPr lang="ko-KR" altLang="en-US" sz="1600" spc="-50" dirty="0" err="1"/>
-              <a:t>환경재</a:t>
-            </a:r>
-            <a:r>
-              <a:rPr lang="ko-KR" altLang="en-US" sz="1600" spc="-50" dirty="0"/>
-              <a:t> 이용을 위해 경제적 유인을 어떻게 사용할 수 있을지 검토가 필요</a:t>
-            </a:r>
-            <a:r>
-              <a:rPr lang="en-US" altLang="ko-KR" sz="1600" spc="-50" dirty="0"/>
-              <a:t>.</a:t>
-            </a:r>
-          </a:p>
-          <a:p>
-            <a:pPr marL="835025" lvl="1" indent="-285750">
-              <a:lnSpc>
-                <a:spcPct val="150000"/>
-              </a:lnSpc>
-              <a:buFont typeface="Wingdings" panose="05000000000000000000" pitchFamily="2" charset="2"/>
-              <a:buChar char="ü"/>
-            </a:pPr>
-            <a:r>
-              <a:rPr lang="ko-KR" altLang="en-US" sz="1600" spc="-50" dirty="0"/>
-              <a:t>오염물질에 대해 배출부과금을 부과</a:t>
-            </a:r>
-            <a:endParaRPr lang="en-US" altLang="ko-KR" sz="1600" spc="-50" dirty="0"/>
-          </a:p>
-          <a:p>
-            <a:pPr marL="835025" lvl="1" indent="-285750">
-              <a:lnSpc>
-                <a:spcPct val="150000"/>
-              </a:lnSpc>
-              <a:buFont typeface="Wingdings" panose="05000000000000000000" pitchFamily="2" charset="2"/>
-              <a:buChar char="ü"/>
-            </a:pPr>
-            <a:r>
-              <a:rPr lang="ko-KR" altLang="en-US" sz="1600" spc="-50" dirty="0"/>
-              <a:t>오염물질 배출량 한도를 부여</a:t>
-            </a:r>
-            <a:endParaRPr lang="en-US" altLang="ko-KR" sz="1600" spc="-50" dirty="0"/>
-          </a:p>
-        </p:txBody>
-      </p:sp>
-    </p:spTree>
-    <p:extLst>
-      <p:ext uri="{BB962C8B-B14F-4D97-AF65-F5344CB8AC3E}">
-        <p14:creationId xmlns:p14="http://schemas.microsoft.com/office/powerpoint/2010/main" val="2003891703"/>
-      </p:ext>
-    </p:extLst>
-  </p:cSld>
-  <p:clrMapOvr>
-    <a:masterClrMapping/>
-  </p:clrMapOvr>
-</p:sld>
-</file>
-
-<file path=ppt/slides/slide29.xml><?xml version="1.0" encoding="utf-8"?>
-<p:sld xmlns:a="http://schemas.openxmlformats.org/drawingml/2006/main" xmlns:r="http://schemas.openxmlformats.org/officeDocument/2006/relationships" xmlns:p="http://schemas.openxmlformats.org/presentationml/2006/main">
-  <p:cSld>
-    <p:spTree>
-      <p:nvGrpSpPr>
-        <p:cNvPr id="1" name=""/>
-        <p:cNvGrpSpPr/>
-        <p:nvPr/>
-      </p:nvGrpSpPr>
-      <p:grpSpPr>
-        <a:xfrm>
-          <a:off x="0" y="0"/>
-          <a:ext cx="0" cy="0"/>
-          <a:chOff x="0" y="0"/>
-          <a:chExt cx="0" cy="0"/>
-        </a:xfrm>
-      </p:grpSpPr>
-      <p:sp>
-        <p:nvSpPr>
-          <p:cNvPr id="2" name="제목 1">
-            <a:extLst>
-              <a:ext uri="{FF2B5EF4-FFF2-40B4-BE49-F238E27FC236}">
-                <a16:creationId xmlns:a16="http://schemas.microsoft.com/office/drawing/2014/main" id="{FA1D9EA1-BCB1-13A7-8943-3DBD533D7B97}"/>
-              </a:ext>
-            </a:extLst>
-          </p:cNvPr>
-          <p:cNvSpPr>
-            <a:spLocks noGrp="1"/>
-          </p:cNvSpPr>
-          <p:nvPr>
-            <p:ph type="title"/>
-          </p:nvPr>
-        </p:nvSpPr>
-        <p:spPr/>
-        <p:txBody>
-          <a:bodyPr/>
-          <a:lstStyle/>
-          <a:p>
-            <a:r>
-              <a:rPr lang="ko-KR" altLang="en-US" dirty="0"/>
-              <a:t>환경경제학의 주요 주제</a:t>
-            </a:r>
-          </a:p>
-        </p:txBody>
-      </p:sp>
-      <p:sp>
-        <p:nvSpPr>
-          <p:cNvPr id="4" name="슬라이드 번호 개체 틀 3">
-            <a:extLst>
-              <a:ext uri="{FF2B5EF4-FFF2-40B4-BE49-F238E27FC236}">
-                <a16:creationId xmlns:a16="http://schemas.microsoft.com/office/drawing/2014/main" id="{0DABEAF0-5630-E526-57CA-C43BD36FF40A}"/>
-              </a:ext>
-            </a:extLst>
-          </p:cNvPr>
-          <p:cNvSpPr>
-            <a:spLocks noGrp="1"/>
-          </p:cNvSpPr>
-          <p:nvPr>
-            <p:ph type="sldNum" sz="quarter" idx="12"/>
-          </p:nvPr>
-        </p:nvSpPr>
-        <p:spPr/>
-        <p:txBody>
-          <a:bodyPr/>
-          <a:lstStyle/>
-          <a:p>
-            <a:fld id="{109C872D-39A9-4065-8BF3-6A613116E2A1}" type="slidenum">
-              <a:rPr lang="ko-KR" altLang="en-US" smtClean="0"/>
-              <a:t>29</a:t>
-            </a:fld>
-            <a:endParaRPr lang="ko-KR" altLang="en-US"/>
-          </a:p>
-        </p:txBody>
-      </p:sp>
-      <p:sp>
-        <p:nvSpPr>
-          <p:cNvPr id="5" name="TextBox 4">
-            <a:extLst>
-              <a:ext uri="{FF2B5EF4-FFF2-40B4-BE49-F238E27FC236}">
-                <a16:creationId xmlns:a16="http://schemas.microsoft.com/office/drawing/2014/main" id="{E1C4E7F3-EA10-6A47-8781-17F1292D78E5}"/>
-              </a:ext>
-            </a:extLst>
-          </p:cNvPr>
-          <p:cNvSpPr txBox="1"/>
-          <p:nvPr/>
-        </p:nvSpPr>
-        <p:spPr>
-          <a:xfrm>
-            <a:off x="678872" y="1038536"/>
-            <a:ext cx="10975831" cy="2814681"/>
-          </a:xfrm>
-          <a:prstGeom prst="rect">
-            <a:avLst/>
-          </a:prstGeom>
-          <a:noFill/>
-        </p:spPr>
-        <p:txBody>
-          <a:bodyPr wrap="square" rtlCol="0" anchor="t">
-            <a:spAutoFit/>
-          </a:bodyPr>
-          <a:lstStyle/>
-          <a:p>
-            <a:pPr>
-              <a:lnSpc>
-                <a:spcPct val="150000"/>
-              </a:lnSpc>
-            </a:pPr>
-            <a:r>
-              <a:rPr lang="ko-KR" altLang="en-US" u="sng" dirty="0">
-                <a:ln w="3175">
-                  <a:noFill/>
-                </a:ln>
-                <a:latin typeface="HY헤드라인M" panose="02030600000101010101" pitchFamily="18" charset="-127"/>
-                <a:ea typeface="HY헤드라인M" panose="02030600000101010101" pitchFamily="18" charset="-127"/>
-              </a:rPr>
-              <a:t>환경정책의 비용 편익 분석</a:t>
-            </a:r>
-            <a:endParaRPr lang="en-US" altLang="ko-KR" u="sng" dirty="0">
-              <a:ln w="3175">
-                <a:noFill/>
-              </a:ln>
-              <a:latin typeface="HY헤드라인M" panose="02030600000101010101" pitchFamily="18" charset="-127"/>
-              <a:ea typeface="HY헤드라인M" panose="02030600000101010101" pitchFamily="18" charset="-127"/>
-            </a:endParaRPr>
-          </a:p>
-          <a:p>
-            <a:pPr>
-              <a:lnSpc>
-                <a:spcPct val="150000"/>
-              </a:lnSpc>
-            </a:pPr>
-            <a:endParaRPr lang="en-US" altLang="ko-KR" sz="400" u="sng" dirty="0">
-              <a:ln w="3175">
-                <a:noFill/>
-              </a:ln>
-              <a:latin typeface="HY헤드라인M" panose="02030600000101010101" pitchFamily="18" charset="-127"/>
-              <a:ea typeface="HY헤드라인M" panose="02030600000101010101" pitchFamily="18" charset="-127"/>
-            </a:endParaRPr>
-          </a:p>
-          <a:p>
-            <a:pPr marL="377825" indent="-285750">
-              <a:lnSpc>
-                <a:spcPct val="150000"/>
-              </a:lnSpc>
-              <a:buFont typeface="Arial" panose="020B0604020202020204" pitchFamily="34" charset="0"/>
-              <a:buChar char="•"/>
-            </a:pPr>
-            <a:r>
-              <a:rPr lang="ko-KR" altLang="en-US" sz="1600" spc="-50" dirty="0"/>
-              <a:t>환경정책을 실행할 때 소요되는 비용과 발생하는 편익을 계산하여 정책입안에 기초자료로 활용</a:t>
-            </a:r>
-            <a:endParaRPr lang="en-US" altLang="ko-KR" sz="1600" b="1" spc="-50" dirty="0"/>
-          </a:p>
-          <a:p>
-            <a:pPr marL="835025" lvl="1" indent="-285750">
-              <a:lnSpc>
-                <a:spcPct val="150000"/>
-              </a:lnSpc>
-              <a:buFont typeface="Wingdings" panose="05000000000000000000" pitchFamily="2" charset="2"/>
-              <a:buChar char="ü"/>
-            </a:pPr>
-            <a:r>
-              <a:rPr lang="ko-KR" altLang="en-US" sz="1600" spc="-50" dirty="0"/>
-              <a:t>환경재는 시장에서 거래되는 일반 시장재와 달리 가격이 존재하지 않아</a:t>
-            </a:r>
-            <a:r>
-              <a:rPr lang="en-US" altLang="ko-KR" sz="1600" spc="-50" dirty="0"/>
-              <a:t> </a:t>
-            </a:r>
-            <a:r>
-              <a:rPr lang="ko-KR" altLang="en-US" sz="1600" spc="-50" dirty="0"/>
-              <a:t>어려운 부분이 있음</a:t>
-            </a:r>
-            <a:endParaRPr lang="en-US" altLang="ko-KR" sz="1600" spc="-50" dirty="0"/>
-          </a:p>
-          <a:p>
-            <a:pPr marL="835025" lvl="1" indent="-285750">
-              <a:lnSpc>
-                <a:spcPct val="150000"/>
-              </a:lnSpc>
-              <a:buFont typeface="Wingdings" panose="05000000000000000000" pitchFamily="2" charset="2"/>
-              <a:buChar char="ü"/>
-            </a:pPr>
-            <a:endParaRPr lang="en-US" altLang="ko-KR" sz="1600" spc="-50" dirty="0"/>
-          </a:p>
-          <a:p>
-            <a:pPr>
-              <a:lnSpc>
-                <a:spcPct val="150000"/>
-              </a:lnSpc>
-            </a:pPr>
-            <a:r>
-              <a:rPr lang="ko-KR" altLang="en-US" u="sng" dirty="0">
-                <a:ln w="3175">
-                  <a:noFill/>
-                </a:ln>
-                <a:latin typeface="HY헤드라인M" panose="02030600000101010101" pitchFamily="18" charset="-127"/>
-                <a:ea typeface="HY헤드라인M" panose="02030600000101010101" pitchFamily="18" charset="-127"/>
-              </a:rPr>
-              <a:t>경제발전과 환경보존</a:t>
-            </a:r>
-            <a:endParaRPr lang="en-US" altLang="ko-KR" sz="400" u="sng" dirty="0">
-              <a:ln w="3175">
-                <a:noFill/>
-              </a:ln>
-              <a:latin typeface="HY헤드라인M" panose="02030600000101010101" pitchFamily="18" charset="-127"/>
-              <a:ea typeface="HY헤드라인M" panose="02030600000101010101" pitchFamily="18" charset="-127"/>
-            </a:endParaRPr>
-          </a:p>
-          <a:p>
-            <a:pPr marL="377825" indent="-285750">
-              <a:lnSpc>
-                <a:spcPct val="150000"/>
-              </a:lnSpc>
-              <a:buFont typeface="Arial" panose="020B0604020202020204" pitchFamily="34" charset="0"/>
-              <a:buChar char="•"/>
-            </a:pPr>
-            <a:r>
-              <a:rPr lang="ko-KR" altLang="en-US" sz="1600" spc="-50" dirty="0"/>
-              <a:t>한때 경제발전과 환경보존은 서로 대립하는 문제라 인식되었으나</a:t>
-            </a:r>
-            <a:r>
-              <a:rPr lang="en-US" altLang="ko-KR" sz="1600" spc="-50" dirty="0"/>
-              <a:t>, </a:t>
-            </a:r>
-            <a:r>
-              <a:rPr lang="ko-KR" altLang="en-US" sz="1600" spc="-50" dirty="0"/>
-              <a:t>경제가 발달한 선진국보다는 저개발국의 환경문제가 더욱 심각하다는 사실이 밝혀짐</a:t>
-            </a:r>
-            <a:endParaRPr lang="en-US" altLang="ko-KR" sz="1600" spc="-50" dirty="0"/>
-          </a:p>
-        </p:txBody>
-      </p:sp>
-    </p:spTree>
-    <p:extLst>
-      <p:ext uri="{BB962C8B-B14F-4D97-AF65-F5344CB8AC3E}">
-        <p14:creationId xmlns:p14="http://schemas.microsoft.com/office/powerpoint/2010/main" val="70890188"/>
-      </p:ext>
-    </p:extLst>
-  </p:cSld>
-  <p:clrMapOvr>
-    <a:masterClrMapping/>
-  </p:clrMapOvr>
-</p:sld>
-</file>
-
 <file path=ppt/slides/slide3.xml><?xml version="1.0" encoding="utf-8"?>
 <p:sld xmlns:a="http://schemas.openxmlformats.org/drawingml/2006/main" xmlns:r="http://schemas.openxmlformats.org/officeDocument/2006/relationships" xmlns:p="http://schemas.openxmlformats.org/presentationml/2006/main">
   <p:cSld>
@@ -15477,1151 +12821,6 @@
     <p:extLst>
       <p:ext uri="{BB962C8B-B14F-4D97-AF65-F5344CB8AC3E}">
         <p14:creationId xmlns:p14="http://schemas.microsoft.com/office/powerpoint/2010/main" val="2957073077"/>
-      </p:ext>
-    </p:extLst>
-  </p:cSld>
-  <p:clrMapOvr>
-    <a:masterClrMapping/>
-  </p:clrMapOvr>
-</p:sld>
-</file>
-
-<file path=ppt/slides/slide30.xml><?xml version="1.0" encoding="utf-8"?>
-<p:sld xmlns:a="http://schemas.openxmlformats.org/drawingml/2006/main" xmlns:r="http://schemas.openxmlformats.org/officeDocument/2006/relationships" xmlns:p="http://schemas.openxmlformats.org/presentationml/2006/main">
-  <p:cSld>
-    <p:spTree>
-      <p:nvGrpSpPr>
-        <p:cNvPr id="1" name="">
-          <a:extLst>
-            <a:ext uri="{FF2B5EF4-FFF2-40B4-BE49-F238E27FC236}">
-              <a16:creationId xmlns:a16="http://schemas.microsoft.com/office/drawing/2014/main" id="{66139DE9-F124-8AD1-1B3E-7239D5C1C13E}"/>
-            </a:ext>
-          </a:extLst>
-        </p:cNvPr>
-        <p:cNvGrpSpPr/>
-        <p:nvPr/>
-      </p:nvGrpSpPr>
-      <p:grpSpPr>
-        <a:xfrm>
-          <a:off x="0" y="0"/>
-          <a:ext cx="0" cy="0"/>
-          <a:chOff x="0" y="0"/>
-          <a:chExt cx="0" cy="0"/>
-        </a:xfrm>
-      </p:grpSpPr>
-      <p:pic>
-        <p:nvPicPr>
-          <p:cNvPr id="6" name="그림 5" descr="텍스트, 로고, 원, 폰트이(가) 표시된 사진&#10;&#10;AI 생성 콘텐츠는 정확하지 않을 수 있습니다.">
-            <a:extLst>
-              <a:ext uri="{FF2B5EF4-FFF2-40B4-BE49-F238E27FC236}">
-                <a16:creationId xmlns:a16="http://schemas.microsoft.com/office/drawing/2014/main" id="{7AF914A4-7E62-6842-6D5E-D0527C9950CD}"/>
-              </a:ext>
-            </a:extLst>
-          </p:cNvPr>
-          <p:cNvPicPr>
-            <a:picLocks noChangeAspect="1"/>
-          </p:cNvPicPr>
-          <p:nvPr/>
-        </p:nvPicPr>
-        <p:blipFill>
-          <a:blip r:embed="rId2">
-            <a:alphaModFix amt="20000"/>
-            <a:extLst>
-              <a:ext uri="{28A0092B-C50C-407E-A947-70E740481C1C}">
-                <a14:useLocalDpi xmlns:a14="http://schemas.microsoft.com/office/drawing/2010/main" val="0"/>
-              </a:ext>
-            </a:extLst>
-          </a:blip>
-          <a:stretch>
-            <a:fillRect/>
-          </a:stretch>
-        </p:blipFill>
-        <p:spPr>
-          <a:xfrm>
-            <a:off x="4012070" y="1673061"/>
-            <a:ext cx="4167861" cy="4167861"/>
-          </a:xfrm>
-          <a:prstGeom prst="rect">
-            <a:avLst/>
-          </a:prstGeom>
-        </p:spPr>
-      </p:pic>
-      <p:sp>
-        <p:nvSpPr>
-          <p:cNvPr id="2" name="제목 1">
-            <a:extLst>
-              <a:ext uri="{FF2B5EF4-FFF2-40B4-BE49-F238E27FC236}">
-                <a16:creationId xmlns:a16="http://schemas.microsoft.com/office/drawing/2014/main" id="{F668F2F4-C40F-A357-72D8-F7655A994757}"/>
-              </a:ext>
-            </a:extLst>
-          </p:cNvPr>
-          <p:cNvSpPr>
-            <a:spLocks noGrp="1"/>
-          </p:cNvSpPr>
-          <p:nvPr>
-            <p:ph type="title"/>
-          </p:nvPr>
-        </p:nvSpPr>
-        <p:spPr>
-          <a:xfrm>
-            <a:off x="831849" y="2995798"/>
-            <a:ext cx="7740651" cy="1169803"/>
-          </a:xfrm>
-          <a:effectLst>
-            <a:reflection blurRad="50800" stA="45000" endPos="44000" dir="5400000" sy="-100000" algn="bl" rotWithShape="0"/>
-          </a:effectLst>
-        </p:spPr>
-        <p:txBody>
-          <a:bodyPr anchor="b"/>
-          <a:lstStyle/>
-          <a:p>
-            <a:r>
-              <a:rPr lang="ko-KR" altLang="en-US" b="1" i="0" spc="150" dirty="0">
-                <a:ea typeface="HY헤드라인M" panose="02030600000101010101"/>
-              </a:rPr>
-              <a:t>경제와 자연환경</a:t>
-            </a:r>
-            <a:endParaRPr lang="ko-KR" altLang="en-US" sz="5400" i="0" spc="150" dirty="0"/>
-          </a:p>
-        </p:txBody>
-      </p:sp>
-      <p:sp>
-        <p:nvSpPr>
-          <p:cNvPr id="4" name="슬라이드 번호 개체 틀 3">
-            <a:extLst>
-              <a:ext uri="{FF2B5EF4-FFF2-40B4-BE49-F238E27FC236}">
-                <a16:creationId xmlns:a16="http://schemas.microsoft.com/office/drawing/2014/main" id="{2CB45A8B-61E2-6F78-56FC-B63048738724}"/>
-              </a:ext>
-            </a:extLst>
-          </p:cNvPr>
-          <p:cNvSpPr>
-            <a:spLocks noGrp="1"/>
-          </p:cNvSpPr>
-          <p:nvPr>
-            <p:ph type="sldNum" sz="quarter" idx="12"/>
-          </p:nvPr>
-        </p:nvSpPr>
-        <p:spPr/>
-        <p:txBody>
-          <a:bodyPr/>
-          <a:lstStyle/>
-          <a:p>
-            <a:fld id="{109C872D-39A9-4065-8BF3-6A613116E2A1}" type="slidenum">
-              <a:rPr lang="ko-KR" altLang="en-US" smtClean="0"/>
-              <a:t>30</a:t>
-            </a:fld>
-            <a:endParaRPr lang="ko-KR" altLang="en-US"/>
-          </a:p>
-        </p:txBody>
-      </p:sp>
-    </p:spTree>
-    <p:extLst>
-      <p:ext uri="{BB962C8B-B14F-4D97-AF65-F5344CB8AC3E}">
-        <p14:creationId xmlns:p14="http://schemas.microsoft.com/office/powerpoint/2010/main" val="4114125818"/>
-      </p:ext>
-    </p:extLst>
-  </p:cSld>
-  <p:clrMapOvr>
-    <a:masterClrMapping/>
-  </p:clrMapOvr>
-</p:sld>
-</file>
-
-<file path=ppt/slides/slide31.xml><?xml version="1.0" encoding="utf-8"?>
-<p:sld xmlns:a="http://schemas.openxmlformats.org/drawingml/2006/main" xmlns:r="http://schemas.openxmlformats.org/officeDocument/2006/relationships" xmlns:p="http://schemas.openxmlformats.org/presentationml/2006/main">
-  <p:cSld>
-    <p:spTree>
-      <p:nvGrpSpPr>
-        <p:cNvPr id="1" name="">
-          <a:extLst>
-            <a:ext uri="{FF2B5EF4-FFF2-40B4-BE49-F238E27FC236}">
-              <a16:creationId xmlns:a16="http://schemas.microsoft.com/office/drawing/2014/main" id="{C9368F4D-1980-8CE0-25FC-1DD646F8FB83}"/>
-            </a:ext>
-          </a:extLst>
-        </p:cNvPr>
-        <p:cNvGrpSpPr/>
-        <p:nvPr/>
-      </p:nvGrpSpPr>
-      <p:grpSpPr>
-        <a:xfrm>
-          <a:off x="0" y="0"/>
-          <a:ext cx="0" cy="0"/>
-          <a:chOff x="0" y="0"/>
-          <a:chExt cx="0" cy="0"/>
-        </a:xfrm>
-      </p:grpSpPr>
-      <p:sp>
-        <p:nvSpPr>
-          <p:cNvPr id="2" name="제목 1">
-            <a:extLst>
-              <a:ext uri="{FF2B5EF4-FFF2-40B4-BE49-F238E27FC236}">
-                <a16:creationId xmlns:a16="http://schemas.microsoft.com/office/drawing/2014/main" id="{7912C4A5-5B6B-B082-486A-791821F2C7FD}"/>
-              </a:ext>
-            </a:extLst>
-          </p:cNvPr>
-          <p:cNvSpPr>
-            <a:spLocks noGrp="1"/>
-          </p:cNvSpPr>
-          <p:nvPr>
-            <p:ph type="title"/>
-          </p:nvPr>
-        </p:nvSpPr>
-        <p:spPr/>
-        <p:txBody>
-          <a:bodyPr/>
-          <a:lstStyle/>
-          <a:p>
-            <a:r>
-              <a:rPr lang="ko-KR" altLang="en-US" dirty="0"/>
-              <a:t>경제와 환경의 상호관련성</a:t>
-            </a:r>
-          </a:p>
-        </p:txBody>
-      </p:sp>
-      <p:sp>
-        <p:nvSpPr>
-          <p:cNvPr id="4" name="슬라이드 번호 개체 틀 3">
-            <a:extLst>
-              <a:ext uri="{FF2B5EF4-FFF2-40B4-BE49-F238E27FC236}">
-                <a16:creationId xmlns:a16="http://schemas.microsoft.com/office/drawing/2014/main" id="{232310A7-2FCA-3C38-1B5B-B0613F0487F1}"/>
-              </a:ext>
-            </a:extLst>
-          </p:cNvPr>
-          <p:cNvSpPr>
-            <a:spLocks noGrp="1"/>
-          </p:cNvSpPr>
-          <p:nvPr>
-            <p:ph type="sldNum" sz="quarter" idx="12"/>
-          </p:nvPr>
-        </p:nvSpPr>
-        <p:spPr/>
-        <p:txBody>
-          <a:bodyPr/>
-          <a:lstStyle/>
-          <a:p>
-            <a:fld id="{109C872D-39A9-4065-8BF3-6A613116E2A1}" type="slidenum">
-              <a:rPr lang="ko-KR" altLang="en-US" smtClean="0"/>
-              <a:t>31</a:t>
-            </a:fld>
-            <a:endParaRPr lang="ko-KR" altLang="en-US"/>
-          </a:p>
-        </p:txBody>
-      </p:sp>
-      <p:sp>
-        <p:nvSpPr>
-          <p:cNvPr id="3" name="TextBox 2">
-            <a:extLst>
-              <a:ext uri="{FF2B5EF4-FFF2-40B4-BE49-F238E27FC236}">
-                <a16:creationId xmlns:a16="http://schemas.microsoft.com/office/drawing/2014/main" id="{7BF9A69D-97C5-3370-0A90-D0F7D193F1E7}"/>
-              </a:ext>
-            </a:extLst>
-          </p:cNvPr>
-          <p:cNvSpPr txBox="1"/>
-          <p:nvPr/>
-        </p:nvSpPr>
-        <p:spPr>
-          <a:xfrm>
-            <a:off x="678872" y="1038536"/>
-            <a:ext cx="10975831" cy="5353838"/>
-          </a:xfrm>
-          <a:prstGeom prst="rect">
-            <a:avLst/>
-          </a:prstGeom>
-          <a:noFill/>
-        </p:spPr>
-        <p:txBody>
-          <a:bodyPr wrap="square" rtlCol="0" anchor="t">
-            <a:spAutoFit/>
-          </a:bodyPr>
-          <a:lstStyle/>
-          <a:p>
-            <a:pPr>
-              <a:lnSpc>
-                <a:spcPct val="150000"/>
-              </a:lnSpc>
-            </a:pPr>
-            <a:r>
-              <a:rPr lang="ko-KR" altLang="en-US" u="sng" dirty="0">
-                <a:ln w="3175">
-                  <a:noFill/>
-                </a:ln>
-                <a:latin typeface="HY헤드라인M" panose="02030600000101010101" pitchFamily="18" charset="-127"/>
-                <a:ea typeface="HY헤드라인M" panose="02030600000101010101" pitchFamily="18" charset="-127"/>
-              </a:rPr>
-              <a:t>물질균형접근법 </a:t>
-            </a:r>
-            <a:r>
-              <a:rPr lang="en-US" altLang="ko-KR" u="sng" dirty="0">
-                <a:ln w="3175">
-                  <a:noFill/>
-                </a:ln>
-                <a:latin typeface="HY헤드라인M" panose="02030600000101010101" pitchFamily="18" charset="-127"/>
-                <a:ea typeface="HY헤드라인M" panose="02030600000101010101" pitchFamily="18" charset="-127"/>
-              </a:rPr>
-              <a:t>(Kneese et al., 1970)</a:t>
-            </a:r>
-          </a:p>
-          <a:p>
-            <a:pPr>
-              <a:lnSpc>
-                <a:spcPct val="150000"/>
-              </a:lnSpc>
-            </a:pPr>
-            <a:endParaRPr lang="en-US" altLang="ko-KR" sz="400" u="sng" dirty="0">
-              <a:ln w="3175">
-                <a:noFill/>
-              </a:ln>
-              <a:latin typeface="HY헤드라인M" panose="02030600000101010101" pitchFamily="18" charset="-127"/>
-              <a:ea typeface="HY헤드라인M" panose="02030600000101010101" pitchFamily="18" charset="-127"/>
-            </a:endParaRPr>
-          </a:p>
-          <a:p>
-            <a:pPr marL="377825" indent="-285750">
-              <a:lnSpc>
-                <a:spcPct val="150000"/>
-              </a:lnSpc>
-              <a:buFont typeface="Arial" panose="020B0604020202020204" pitchFamily="34" charset="0"/>
-              <a:buChar char="•"/>
-            </a:pPr>
-            <a:r>
-              <a:rPr lang="ko-KR" altLang="en-US" sz="1600" spc="-50" dirty="0"/>
-              <a:t>가장 일차적으로는 가계가 자연으로부터의 서비스를 직접적으로 소비</a:t>
-            </a:r>
-            <a:endParaRPr lang="en-US" altLang="ko-KR" sz="1600" spc="-50" dirty="0"/>
-          </a:p>
-          <a:p>
-            <a:pPr marL="835025" lvl="1" indent="-285750">
-              <a:lnSpc>
-                <a:spcPct val="150000"/>
-              </a:lnSpc>
-              <a:buFont typeface="Wingdings" panose="05000000000000000000" pitchFamily="2" charset="2"/>
-              <a:buChar char="ü"/>
-            </a:pPr>
-            <a:r>
-              <a:rPr lang="ko-KR" altLang="en-US" sz="1600" spc="-50" dirty="0"/>
-              <a:t>아름다운 자연경관으로부터의 즐거움</a:t>
-            </a:r>
-            <a:r>
-              <a:rPr lang="en-US" altLang="ko-KR" sz="1600" spc="-50" dirty="0"/>
-              <a:t>, </a:t>
-            </a:r>
-            <a:r>
-              <a:rPr lang="ko-KR" altLang="en-US" sz="1600" spc="-50" dirty="0"/>
-              <a:t>깨끗한 공기</a:t>
-            </a:r>
-            <a:endParaRPr lang="en-US" altLang="ko-KR" sz="1600" spc="-50" dirty="0"/>
-          </a:p>
-          <a:p>
-            <a:pPr marL="377825" indent="-285750">
-              <a:lnSpc>
-                <a:spcPct val="150000"/>
-              </a:lnSpc>
-              <a:buFont typeface="Arial" panose="020B0604020202020204" pitchFamily="34" charset="0"/>
-              <a:buChar char="•"/>
-            </a:pPr>
-            <a:r>
-              <a:rPr lang="ko-KR" altLang="en-US" sz="1600" spc="-50" dirty="0"/>
-              <a:t>또한 가계는 지구의 천연자원으로부터 다양한 물질과 에너지를 추출하여</a:t>
-            </a:r>
-            <a:r>
-              <a:rPr lang="en-US" altLang="ko-KR" sz="1600" spc="-50" dirty="0"/>
-              <a:t> </a:t>
-            </a:r>
-            <a:r>
-              <a:rPr lang="ko-KR" altLang="en-US" sz="1600" spc="-50" dirty="0"/>
-              <a:t>생산요소시장에 공급</a:t>
-            </a:r>
-            <a:endParaRPr lang="en-US" altLang="ko-KR" sz="1600" b="1" spc="-50" dirty="0"/>
-          </a:p>
-          <a:p>
-            <a:pPr marL="835025" lvl="1" indent="-285750">
-              <a:lnSpc>
-                <a:spcPct val="150000"/>
-              </a:lnSpc>
-              <a:buFont typeface="Wingdings" panose="05000000000000000000" pitchFamily="2" charset="2"/>
-              <a:buChar char="ü"/>
-            </a:pPr>
-            <a:r>
-              <a:rPr lang="ko-KR" altLang="en-US" sz="1600" spc="-50" dirty="0"/>
-              <a:t>농부가 식품회사와 노동과 토지를 제공</a:t>
-            </a:r>
-            <a:endParaRPr lang="en-US" altLang="ko-KR" sz="1600" spc="-50" dirty="0"/>
-          </a:p>
-          <a:p>
-            <a:pPr marL="377825" indent="-285750">
-              <a:lnSpc>
-                <a:spcPct val="150000"/>
-              </a:lnSpc>
-              <a:buFont typeface="Arial" panose="020B0604020202020204" pitchFamily="34" charset="0"/>
-              <a:buChar char="•"/>
-            </a:pPr>
-            <a:r>
-              <a:rPr lang="ko-KR" altLang="en-US" sz="1600" spc="-50" dirty="0"/>
-              <a:t>기업은 생산요소시장에서 생산요소를 구매하여 최종생산물의 원료로 사용하고</a:t>
-            </a:r>
-            <a:r>
-              <a:rPr lang="en-US" altLang="ko-KR" sz="1600" spc="-50" dirty="0"/>
-              <a:t>, </a:t>
-            </a:r>
-            <a:r>
-              <a:rPr lang="ko-KR" altLang="en-US" sz="1600" spc="-50" dirty="0"/>
-              <a:t>최종 산출물을 산출물 시장에 공급</a:t>
-            </a:r>
-            <a:endParaRPr lang="en-US" altLang="ko-KR" sz="1600" spc="-50" dirty="0"/>
-          </a:p>
-          <a:p>
-            <a:pPr marL="835025" lvl="1" indent="-285750">
-              <a:lnSpc>
-                <a:spcPct val="150000"/>
-              </a:lnSpc>
-              <a:buFont typeface="Wingdings" panose="05000000000000000000" pitchFamily="2" charset="2"/>
-              <a:buChar char="ü"/>
-            </a:pPr>
-            <a:r>
-              <a:rPr lang="ko-KR" altLang="en-US" sz="1600" spc="-50" dirty="0"/>
-              <a:t>식품회사는 노동과 토지를 활용하여 밀가루를 생산하고</a:t>
-            </a:r>
-            <a:r>
-              <a:rPr lang="en-US" altLang="ko-KR" sz="1600" spc="-50" dirty="0"/>
-              <a:t>, </a:t>
-            </a:r>
-            <a:r>
-              <a:rPr lang="ko-KR" altLang="en-US" sz="1600" spc="-50" dirty="0"/>
-              <a:t>밀가루는 다시 가계에 공급</a:t>
-            </a:r>
-            <a:endParaRPr lang="en-US" altLang="ko-KR" sz="1600" spc="-50" dirty="0"/>
-          </a:p>
-          <a:p>
-            <a:pPr marL="377825" indent="-285750">
-              <a:lnSpc>
-                <a:spcPct val="150000"/>
-              </a:lnSpc>
-              <a:buFont typeface="Arial" panose="020B0604020202020204" pitchFamily="34" charset="0"/>
-              <a:buChar char="•"/>
-            </a:pPr>
-            <a:r>
-              <a:rPr lang="ko-KR" altLang="en-US" sz="1600" spc="-50" dirty="0"/>
-              <a:t>경제 행위 결과로 발생하여 자연으로 배출되는 폐기물이 발생 </a:t>
-            </a:r>
-            <a:endParaRPr lang="en-US" altLang="ko-KR" sz="1600" spc="-50" dirty="0"/>
-          </a:p>
-          <a:p>
-            <a:pPr marL="835025" lvl="1" indent="-285750">
-              <a:lnSpc>
-                <a:spcPct val="150000"/>
-              </a:lnSpc>
-              <a:buFont typeface="Wingdings" panose="05000000000000000000" pitchFamily="2" charset="2"/>
-              <a:buChar char="ü"/>
-            </a:pPr>
-            <a:r>
-              <a:rPr lang="ko-KR" altLang="en-US" sz="1600" spc="-50" dirty="0"/>
-              <a:t>자연의 흡수 기능에 의해 흡수되거나 </a:t>
-            </a:r>
-            <a:r>
-              <a:rPr lang="en-US" altLang="ko-KR" sz="1600" spc="-50" dirty="0"/>
-              <a:t>(</a:t>
-            </a:r>
-            <a:r>
-              <a:rPr lang="ko-KR" altLang="en-US" sz="1600" spc="-50" dirty="0"/>
-              <a:t>예</a:t>
-            </a:r>
-            <a:r>
-              <a:rPr lang="en-US" altLang="ko-KR" sz="1600" spc="-50" dirty="0"/>
-              <a:t>: </a:t>
-            </a:r>
-            <a:r>
-              <a:rPr lang="ko-KR" altLang="en-US" sz="1600" spc="-50" dirty="0"/>
-              <a:t>음식물 쓰레기 퇴비화</a:t>
-            </a:r>
-            <a:r>
-              <a:rPr lang="en-US" altLang="ko-KR" sz="1600" spc="-50" dirty="0"/>
-              <a:t>), </a:t>
-            </a:r>
-            <a:r>
-              <a:rPr lang="ko-KR" altLang="en-US" sz="1600" spc="-50" dirty="0"/>
-              <a:t>오염물질의 형태로 자연에 잔류 </a:t>
-            </a:r>
-            <a:r>
-              <a:rPr lang="en-US" altLang="ko-KR" sz="1600" spc="-50" dirty="0"/>
-              <a:t>(</a:t>
-            </a:r>
-            <a:r>
-              <a:rPr lang="ko-KR" altLang="en-US" sz="1600" spc="-50" dirty="0"/>
-              <a:t>예</a:t>
-            </a:r>
-            <a:r>
-              <a:rPr lang="en-US" altLang="ko-KR" sz="1600" spc="-50" dirty="0"/>
-              <a:t>: </a:t>
-            </a:r>
-            <a:r>
-              <a:rPr lang="ko-KR" altLang="en-US" sz="1600" spc="-50" dirty="0"/>
-              <a:t>온실가스</a:t>
-            </a:r>
-            <a:r>
-              <a:rPr lang="en-US" altLang="ko-KR" sz="1600" spc="-50" dirty="0"/>
-              <a:t>)</a:t>
-            </a:r>
-          </a:p>
-          <a:p>
-            <a:pPr marL="835025" lvl="1" indent="-285750">
-              <a:lnSpc>
-                <a:spcPct val="150000"/>
-              </a:lnSpc>
-              <a:buFont typeface="Wingdings" panose="05000000000000000000" pitchFamily="2" charset="2"/>
-              <a:buChar char="ü"/>
-            </a:pPr>
-            <a:endParaRPr lang="en-US" altLang="ko-KR" sz="1600" spc="-50" dirty="0"/>
-          </a:p>
-          <a:p>
-            <a:pPr marL="377825" indent="-285750">
-              <a:lnSpc>
-                <a:spcPct val="150000"/>
-              </a:lnSpc>
-              <a:buFont typeface="Arial" panose="020B0604020202020204" pitchFamily="34" charset="0"/>
-              <a:buChar char="•"/>
-            </a:pPr>
-            <a:r>
-              <a:rPr lang="en-US" altLang="ko-KR" sz="1600" spc="-50" dirty="0"/>
-              <a:t>(</a:t>
-            </a:r>
-            <a:r>
-              <a:rPr lang="ko-KR" altLang="en-US" sz="1600" spc="-50" dirty="0"/>
-              <a:t>자원의 종류</a:t>
-            </a:r>
-            <a:r>
-              <a:rPr lang="en-US" altLang="ko-KR" sz="1600" spc="-50" dirty="0"/>
-              <a:t>) </a:t>
-            </a:r>
-            <a:r>
-              <a:rPr lang="ko-KR" altLang="en-US" sz="1600" spc="-50" dirty="0"/>
-              <a:t>자연이 공급해주는 자원은 두 종류로 구분할 수 있음</a:t>
-            </a:r>
-            <a:endParaRPr lang="en-US" altLang="ko-KR" sz="1600" spc="-50" dirty="0"/>
-          </a:p>
-          <a:p>
-            <a:pPr marL="835025" lvl="1" indent="-285750">
-              <a:lnSpc>
-                <a:spcPct val="150000"/>
-              </a:lnSpc>
-              <a:buFont typeface="Wingdings" panose="05000000000000000000" pitchFamily="2" charset="2"/>
-              <a:buChar char="ü"/>
-            </a:pPr>
-            <a:r>
-              <a:rPr lang="ko-KR" altLang="en-US" sz="1600" spc="-50" dirty="0"/>
-              <a:t>재생가능자원</a:t>
-            </a:r>
-            <a:r>
-              <a:rPr lang="en-US" altLang="ko-KR" sz="1600" spc="-50" dirty="0"/>
-              <a:t>: </a:t>
-            </a:r>
-            <a:r>
-              <a:rPr lang="ko-KR" altLang="en-US" sz="1600" spc="-50" dirty="0"/>
-              <a:t>동</a:t>
-            </a:r>
-            <a:r>
-              <a:rPr lang="en-US" altLang="ko-KR" sz="1600" spc="-50" dirty="0"/>
-              <a:t>·</a:t>
-            </a:r>
-            <a:r>
-              <a:rPr lang="ko-KR" altLang="en-US" sz="1600" spc="-50" dirty="0"/>
-              <a:t>식물</a:t>
-            </a:r>
-            <a:r>
-              <a:rPr lang="en-US" altLang="ko-KR" sz="1600" spc="-50" dirty="0"/>
-              <a:t>, </a:t>
-            </a:r>
-            <a:r>
-              <a:rPr lang="ko-KR" altLang="en-US" sz="1600" spc="-50" dirty="0"/>
-              <a:t>태양에너지</a:t>
-            </a:r>
-            <a:r>
-              <a:rPr lang="en-US" altLang="ko-KR" sz="1600" spc="-50" dirty="0"/>
-              <a:t>, </a:t>
-            </a:r>
-            <a:r>
-              <a:rPr lang="ko-KR" altLang="en-US" sz="1600" spc="-50" dirty="0"/>
-              <a:t>풍력에너지 </a:t>
-            </a:r>
-            <a:endParaRPr lang="en-US" altLang="ko-KR" sz="1600" spc="-50" dirty="0"/>
-          </a:p>
-          <a:p>
-            <a:pPr marL="835025" lvl="1" indent="-285750">
-              <a:lnSpc>
-                <a:spcPct val="150000"/>
-              </a:lnSpc>
-              <a:buFont typeface="Wingdings" panose="05000000000000000000" pitchFamily="2" charset="2"/>
-              <a:buChar char="ü"/>
-            </a:pPr>
-            <a:r>
-              <a:rPr lang="ko-KR" altLang="en-US" sz="1600" spc="-50" dirty="0"/>
-              <a:t>재생불가능자원</a:t>
-            </a:r>
-            <a:r>
-              <a:rPr lang="en-US" altLang="ko-KR" sz="1600" spc="-50" dirty="0"/>
-              <a:t>: </a:t>
-            </a:r>
-            <a:r>
-              <a:rPr lang="ko-KR" altLang="en-US" sz="1600" spc="-50" dirty="0"/>
-              <a:t>석유</a:t>
-            </a:r>
-            <a:r>
-              <a:rPr lang="en-US" altLang="ko-KR" sz="1600" spc="-50" dirty="0"/>
-              <a:t>, </a:t>
-            </a:r>
-            <a:r>
-              <a:rPr lang="ko-KR" altLang="en-US" sz="1600" spc="-50" dirty="0"/>
-              <a:t>석탄</a:t>
-            </a:r>
-            <a:r>
-              <a:rPr lang="en-US" altLang="ko-KR" sz="1600" spc="-50" dirty="0"/>
-              <a:t>, </a:t>
-            </a:r>
-            <a:r>
-              <a:rPr lang="ko-KR" altLang="en-US" sz="1600" spc="-50" dirty="0"/>
-              <a:t>금속</a:t>
-            </a:r>
-            <a:endParaRPr lang="en-US" altLang="ko-KR" sz="1600" spc="-50" dirty="0"/>
-          </a:p>
-          <a:p>
-            <a:pPr marL="549275" lvl="1">
-              <a:lnSpc>
-                <a:spcPct val="150000"/>
-              </a:lnSpc>
-            </a:pPr>
-            <a:endParaRPr lang="en-US" altLang="ko-KR" sz="1600" spc="-50" dirty="0"/>
-          </a:p>
-        </p:txBody>
-      </p:sp>
-    </p:spTree>
-    <p:extLst>
-      <p:ext uri="{BB962C8B-B14F-4D97-AF65-F5344CB8AC3E}">
-        <p14:creationId xmlns:p14="http://schemas.microsoft.com/office/powerpoint/2010/main" val="2157773233"/>
-      </p:ext>
-    </p:extLst>
-  </p:cSld>
-  <p:clrMapOvr>
-    <a:masterClrMapping/>
-  </p:clrMapOvr>
-</p:sld>
-</file>
-
-<file path=ppt/slides/slide32.xml><?xml version="1.0" encoding="utf-8"?>
-<p:sld xmlns:a="http://schemas.openxmlformats.org/drawingml/2006/main" xmlns:r="http://schemas.openxmlformats.org/officeDocument/2006/relationships" xmlns:p="http://schemas.openxmlformats.org/presentationml/2006/main">
-  <p:cSld>
-    <p:spTree>
-      <p:nvGrpSpPr>
-        <p:cNvPr id="1" name="">
-          <a:extLst>
-            <a:ext uri="{FF2B5EF4-FFF2-40B4-BE49-F238E27FC236}">
-              <a16:creationId xmlns:a16="http://schemas.microsoft.com/office/drawing/2014/main" id="{A37F7351-04D3-BD83-8C9C-844D1DBF2BED}"/>
-            </a:ext>
-          </a:extLst>
-        </p:cNvPr>
-        <p:cNvGrpSpPr/>
-        <p:nvPr/>
-      </p:nvGrpSpPr>
-      <p:grpSpPr>
-        <a:xfrm>
-          <a:off x="0" y="0"/>
-          <a:ext cx="0" cy="0"/>
-          <a:chOff x="0" y="0"/>
-          <a:chExt cx="0" cy="0"/>
-        </a:xfrm>
-      </p:grpSpPr>
-      <p:sp>
-        <p:nvSpPr>
-          <p:cNvPr id="2" name="제목 1">
-            <a:extLst>
-              <a:ext uri="{FF2B5EF4-FFF2-40B4-BE49-F238E27FC236}">
-                <a16:creationId xmlns:a16="http://schemas.microsoft.com/office/drawing/2014/main" id="{22721744-48B5-8408-A63F-E37C479BA9F2}"/>
-              </a:ext>
-            </a:extLst>
-          </p:cNvPr>
-          <p:cNvSpPr>
-            <a:spLocks noGrp="1"/>
-          </p:cNvSpPr>
-          <p:nvPr>
-            <p:ph type="title"/>
-          </p:nvPr>
-        </p:nvSpPr>
-        <p:spPr/>
-        <p:txBody>
-          <a:bodyPr/>
-          <a:lstStyle/>
-          <a:p>
-            <a:r>
-              <a:rPr lang="ko-KR" altLang="en-US" dirty="0"/>
-              <a:t>열역학 법칙</a:t>
-            </a:r>
-          </a:p>
-        </p:txBody>
-      </p:sp>
-      <p:sp>
-        <p:nvSpPr>
-          <p:cNvPr id="4" name="슬라이드 번호 개체 틀 3">
-            <a:extLst>
-              <a:ext uri="{FF2B5EF4-FFF2-40B4-BE49-F238E27FC236}">
-                <a16:creationId xmlns:a16="http://schemas.microsoft.com/office/drawing/2014/main" id="{A6779632-63AD-6204-BA79-3B80C423EFF2}"/>
-              </a:ext>
-            </a:extLst>
-          </p:cNvPr>
-          <p:cNvSpPr>
-            <a:spLocks noGrp="1"/>
-          </p:cNvSpPr>
-          <p:nvPr>
-            <p:ph type="sldNum" sz="quarter" idx="12"/>
-          </p:nvPr>
-        </p:nvSpPr>
-        <p:spPr/>
-        <p:txBody>
-          <a:bodyPr/>
-          <a:lstStyle/>
-          <a:p>
-            <a:fld id="{109C872D-39A9-4065-8BF3-6A613116E2A1}" type="slidenum">
-              <a:rPr lang="ko-KR" altLang="en-US" smtClean="0"/>
-              <a:t>32</a:t>
-            </a:fld>
-            <a:endParaRPr lang="ko-KR" altLang="en-US"/>
-          </a:p>
-        </p:txBody>
-      </p:sp>
-      <p:sp>
-        <p:nvSpPr>
-          <p:cNvPr id="5" name="TextBox 4">
-            <a:extLst>
-              <a:ext uri="{FF2B5EF4-FFF2-40B4-BE49-F238E27FC236}">
-                <a16:creationId xmlns:a16="http://schemas.microsoft.com/office/drawing/2014/main" id="{4DD9939B-ED34-5853-AF08-6694826F8B24}"/>
-              </a:ext>
-            </a:extLst>
-          </p:cNvPr>
-          <p:cNvSpPr txBox="1"/>
-          <p:nvPr/>
-        </p:nvSpPr>
-        <p:spPr>
-          <a:xfrm>
-            <a:off x="678872" y="1038536"/>
-            <a:ext cx="10975831" cy="3184013"/>
-          </a:xfrm>
-          <a:prstGeom prst="rect">
-            <a:avLst/>
-          </a:prstGeom>
-          <a:noFill/>
-        </p:spPr>
-        <p:txBody>
-          <a:bodyPr wrap="square" rtlCol="0" anchor="t">
-            <a:spAutoFit/>
-          </a:bodyPr>
-          <a:lstStyle/>
-          <a:p>
-            <a:pPr>
-              <a:lnSpc>
-                <a:spcPct val="150000"/>
-              </a:lnSpc>
-            </a:pPr>
-            <a:r>
-              <a:rPr lang="ko-KR" altLang="en-US" u="sng" dirty="0">
-                <a:ln w="3175">
-                  <a:noFill/>
-                </a:ln>
-                <a:latin typeface="HY헤드라인M" panose="02030600000101010101" pitchFamily="18" charset="-127"/>
-                <a:ea typeface="HY헤드라인M" panose="02030600000101010101" pitchFamily="18" charset="-127"/>
-              </a:rPr>
-              <a:t>열역학 제 </a:t>
-            </a:r>
-            <a:r>
-              <a:rPr lang="en-US" altLang="ko-KR" u="sng" dirty="0">
-                <a:ln w="3175">
-                  <a:noFill/>
-                </a:ln>
-                <a:latin typeface="HY헤드라인M" panose="02030600000101010101" pitchFamily="18" charset="-127"/>
-                <a:ea typeface="HY헤드라인M" panose="02030600000101010101" pitchFamily="18" charset="-127"/>
-              </a:rPr>
-              <a:t>1</a:t>
-            </a:r>
-            <a:r>
-              <a:rPr lang="ko-KR" altLang="en-US" u="sng" dirty="0">
-                <a:ln w="3175">
-                  <a:noFill/>
-                </a:ln>
-                <a:latin typeface="HY헤드라인M" panose="02030600000101010101" pitchFamily="18" charset="-127"/>
-                <a:ea typeface="HY헤드라인M" panose="02030600000101010101" pitchFamily="18" charset="-127"/>
-              </a:rPr>
-              <a:t>법칙</a:t>
-            </a:r>
-            <a:r>
-              <a:rPr lang="en-US" altLang="ko-KR" u="sng" dirty="0">
-                <a:ln w="3175">
-                  <a:noFill/>
-                </a:ln>
-                <a:latin typeface="HY헤드라인M" panose="02030600000101010101" pitchFamily="18" charset="-127"/>
-                <a:ea typeface="HY헤드라인M" panose="02030600000101010101" pitchFamily="18" charset="-127"/>
-              </a:rPr>
-              <a:t>: </a:t>
-            </a:r>
-            <a:r>
-              <a:rPr lang="ko-KR" altLang="en-US" u="sng" dirty="0">
-                <a:ln w="3175">
-                  <a:noFill/>
-                </a:ln>
-                <a:latin typeface="HY헤드라인M" panose="02030600000101010101" pitchFamily="18" charset="-127"/>
-                <a:ea typeface="HY헤드라인M" panose="02030600000101010101" pitchFamily="18" charset="-127"/>
-              </a:rPr>
-              <a:t>에너지 보존의 법칙</a:t>
-            </a:r>
-            <a:endParaRPr lang="en-US" altLang="ko-KR" u="sng" dirty="0">
-              <a:ln w="3175">
-                <a:noFill/>
-              </a:ln>
-              <a:latin typeface="HY헤드라인M" panose="02030600000101010101" pitchFamily="18" charset="-127"/>
-              <a:ea typeface="HY헤드라인M" panose="02030600000101010101" pitchFamily="18" charset="-127"/>
-            </a:endParaRPr>
-          </a:p>
-          <a:p>
-            <a:pPr marL="377825" indent="-285750">
-              <a:lnSpc>
-                <a:spcPct val="150000"/>
-              </a:lnSpc>
-              <a:buFont typeface="Arial" panose="020B0604020202020204" pitchFamily="34" charset="0"/>
-              <a:buChar char="•"/>
-            </a:pPr>
-            <a:r>
-              <a:rPr lang="ko-KR" altLang="en-US" sz="1600" spc="-50" dirty="0"/>
-              <a:t>에너지는 형태를 바꿀 수 있지만</a:t>
-            </a:r>
-            <a:r>
-              <a:rPr lang="en-US" altLang="ko-KR" sz="1600" spc="-50" dirty="0"/>
-              <a:t>, </a:t>
-            </a:r>
-            <a:r>
-              <a:rPr lang="ko-KR" altLang="en-US" sz="1600" spc="-50" dirty="0"/>
-              <a:t>총량은 변하지 않는다</a:t>
-            </a:r>
-            <a:r>
-              <a:rPr lang="en-US" altLang="ko-KR" sz="1600" spc="-50" dirty="0"/>
-              <a:t>.</a:t>
-            </a:r>
-          </a:p>
-          <a:p>
-            <a:pPr marL="835025" lvl="1" indent="-285750">
-              <a:lnSpc>
-                <a:spcPct val="150000"/>
-              </a:lnSpc>
-              <a:buFont typeface="Wingdings" panose="05000000000000000000" pitchFamily="2" charset="2"/>
-              <a:buChar char="ü"/>
-            </a:pPr>
-            <a:r>
-              <a:rPr lang="ko-KR" altLang="en-US" sz="1600" spc="-50" dirty="0"/>
-              <a:t>자연으로부터 추출된 물질이나 에너지는 재활용이나 재사용을 통해 잠시 지체될 수 있지만</a:t>
-            </a:r>
-            <a:r>
-              <a:rPr lang="en-US" altLang="ko-KR" sz="1600" spc="-50" dirty="0"/>
-              <a:t> </a:t>
-            </a:r>
-            <a:r>
-              <a:rPr lang="ko-KR" altLang="en-US" sz="1600" spc="-50" dirty="0"/>
-              <a:t>궁극적으로는 동일한 양의 폐기물로 전환되어 자연으로 환원</a:t>
-            </a:r>
-            <a:endParaRPr lang="en-US" altLang="ko-KR" sz="1600" spc="-50" dirty="0"/>
-          </a:p>
-          <a:p>
-            <a:pPr marL="835025" lvl="1" indent="-285750">
-              <a:lnSpc>
-                <a:spcPct val="150000"/>
-              </a:lnSpc>
-              <a:buFont typeface="Wingdings" panose="05000000000000000000" pitchFamily="2" charset="2"/>
-              <a:buChar char="ü"/>
-            </a:pPr>
-            <a:endParaRPr lang="en-US" altLang="ko-KR" sz="1600" spc="-50" dirty="0"/>
-          </a:p>
-          <a:p>
-            <a:pPr>
-              <a:lnSpc>
-                <a:spcPct val="150000"/>
-              </a:lnSpc>
-            </a:pPr>
-            <a:r>
-              <a:rPr lang="ko-KR" altLang="en-US" u="sng" dirty="0">
-                <a:ln w="3175">
-                  <a:noFill/>
-                </a:ln>
-                <a:latin typeface="HY헤드라인M" panose="02030600000101010101" pitchFamily="18" charset="-127"/>
-                <a:ea typeface="HY헤드라인M" panose="02030600000101010101" pitchFamily="18" charset="-127"/>
-              </a:rPr>
-              <a:t>열역학 제 </a:t>
-            </a:r>
-            <a:r>
-              <a:rPr lang="en-US" altLang="ko-KR" u="sng" dirty="0">
-                <a:ln w="3175">
-                  <a:noFill/>
-                </a:ln>
-                <a:latin typeface="HY헤드라인M" panose="02030600000101010101" pitchFamily="18" charset="-127"/>
-                <a:ea typeface="HY헤드라인M" panose="02030600000101010101" pitchFamily="18" charset="-127"/>
-              </a:rPr>
-              <a:t>2</a:t>
-            </a:r>
-            <a:r>
-              <a:rPr lang="ko-KR" altLang="en-US" u="sng" dirty="0">
-                <a:ln w="3175">
-                  <a:noFill/>
-                </a:ln>
-                <a:latin typeface="HY헤드라인M" panose="02030600000101010101" pitchFamily="18" charset="-127"/>
-                <a:ea typeface="HY헤드라인M" panose="02030600000101010101" pitchFamily="18" charset="-127"/>
-              </a:rPr>
-              <a:t>법칙</a:t>
-            </a:r>
-            <a:r>
-              <a:rPr lang="en-US" altLang="ko-KR" u="sng" dirty="0">
-                <a:ln w="3175">
-                  <a:noFill/>
-                </a:ln>
-                <a:latin typeface="HY헤드라인M" panose="02030600000101010101" pitchFamily="18" charset="-127"/>
-                <a:ea typeface="HY헤드라인M" panose="02030600000101010101" pitchFamily="18" charset="-127"/>
-              </a:rPr>
-              <a:t>: </a:t>
-            </a:r>
-            <a:r>
-              <a:rPr lang="ko-KR" altLang="en-US" u="sng" dirty="0">
-                <a:ln w="3175">
-                  <a:noFill/>
-                </a:ln>
-                <a:latin typeface="HY헤드라인M" panose="02030600000101010101" pitchFamily="18" charset="-127"/>
-                <a:ea typeface="HY헤드라인M" panose="02030600000101010101" pitchFamily="18" charset="-127"/>
-              </a:rPr>
-              <a:t>엔트로피 증가의 법칙</a:t>
-            </a:r>
-            <a:endParaRPr lang="en-US" altLang="ko-KR" u="sng" dirty="0">
-              <a:ln w="3175">
-                <a:noFill/>
-              </a:ln>
-              <a:latin typeface="HY헤드라인M" panose="02030600000101010101" pitchFamily="18" charset="-127"/>
-              <a:ea typeface="HY헤드라인M" panose="02030600000101010101" pitchFamily="18" charset="-127"/>
-            </a:endParaRPr>
-          </a:p>
-          <a:p>
-            <a:pPr>
-              <a:lnSpc>
-                <a:spcPct val="150000"/>
-              </a:lnSpc>
-            </a:pPr>
-            <a:endParaRPr lang="en-US" altLang="ko-KR" sz="400" u="sng" dirty="0">
-              <a:ln w="3175">
-                <a:noFill/>
-              </a:ln>
-              <a:latin typeface="HY헤드라인M" panose="02030600000101010101" pitchFamily="18" charset="-127"/>
-              <a:ea typeface="HY헤드라인M" panose="02030600000101010101" pitchFamily="18" charset="-127"/>
-            </a:endParaRPr>
-          </a:p>
-          <a:p>
-            <a:pPr marL="377825" indent="-285750">
-              <a:lnSpc>
-                <a:spcPct val="150000"/>
-              </a:lnSpc>
-              <a:buFont typeface="Arial" panose="020B0604020202020204" pitchFamily="34" charset="0"/>
-              <a:buChar char="•"/>
-            </a:pPr>
-            <a:r>
-              <a:rPr lang="ko-KR" altLang="en-US" sz="1600" spc="-50" dirty="0"/>
-              <a:t>엔트로피는 항상 증가하거나 유지 된다</a:t>
-            </a:r>
-            <a:r>
-              <a:rPr lang="en-US" altLang="ko-KR" sz="1600" spc="-50" dirty="0"/>
-              <a:t>. </a:t>
-            </a:r>
-            <a:r>
-              <a:rPr lang="ko-KR" altLang="en-US" sz="1600" spc="-50" dirty="0"/>
-              <a:t>열은 </a:t>
-            </a:r>
-            <a:r>
-              <a:rPr lang="ko-KR" altLang="en-US" sz="1600" spc="-50" dirty="0" err="1"/>
-              <a:t>고온에서</a:t>
-            </a:r>
-            <a:r>
-              <a:rPr lang="ko-KR" altLang="en-US" sz="1600" spc="-50" dirty="0"/>
-              <a:t> 저온으로 흐름</a:t>
-            </a:r>
-            <a:r>
-              <a:rPr lang="en-US" altLang="ko-KR" sz="1600" spc="-50" dirty="0"/>
-              <a:t>.</a:t>
-            </a:r>
-          </a:p>
-          <a:p>
-            <a:pPr marL="835025" lvl="1" indent="-285750">
-              <a:lnSpc>
-                <a:spcPct val="150000"/>
-              </a:lnSpc>
-              <a:buFont typeface="Wingdings" panose="05000000000000000000" pitchFamily="2" charset="2"/>
-              <a:buChar char="ü"/>
-            </a:pPr>
-            <a:r>
-              <a:rPr lang="ko-KR" altLang="en-US" sz="1600" spc="-50" dirty="0"/>
-              <a:t>뜨거운 커피는 저절로 식지만</a:t>
-            </a:r>
-            <a:r>
-              <a:rPr lang="en-US" altLang="ko-KR" sz="1600" spc="-50" dirty="0"/>
-              <a:t>, </a:t>
-            </a:r>
-            <a:r>
-              <a:rPr lang="ko-KR" altLang="en-US" sz="1600" spc="-50" dirty="0"/>
-              <a:t>찬 커피는 저절로 뜨거워지지 않는다</a:t>
-            </a:r>
-            <a:r>
-              <a:rPr lang="en-US" altLang="ko-KR" sz="1600" spc="-50" dirty="0"/>
-              <a:t>.</a:t>
-            </a:r>
-          </a:p>
-        </p:txBody>
-      </p:sp>
-    </p:spTree>
-    <p:extLst>
-      <p:ext uri="{BB962C8B-B14F-4D97-AF65-F5344CB8AC3E}">
-        <p14:creationId xmlns:p14="http://schemas.microsoft.com/office/powerpoint/2010/main" val="1401731404"/>
-      </p:ext>
-    </p:extLst>
-  </p:cSld>
-  <p:clrMapOvr>
-    <a:masterClrMapping/>
-  </p:clrMapOvr>
-</p:sld>
-</file>
-
-<file path=ppt/slides/slide33.xml><?xml version="1.0" encoding="utf-8"?>
-<p:sld xmlns:a="http://schemas.openxmlformats.org/drawingml/2006/main" xmlns:r="http://schemas.openxmlformats.org/officeDocument/2006/relationships" xmlns:p="http://schemas.openxmlformats.org/presentationml/2006/main">
-  <p:cSld>
-    <p:spTree>
-      <p:nvGrpSpPr>
-        <p:cNvPr id="1" name="">
-          <a:extLst>
-            <a:ext uri="{FF2B5EF4-FFF2-40B4-BE49-F238E27FC236}">
-              <a16:creationId xmlns:a16="http://schemas.microsoft.com/office/drawing/2014/main" id="{A4179DBF-F5F6-C64A-177C-13BEE4B185FF}"/>
-            </a:ext>
-          </a:extLst>
-        </p:cNvPr>
-        <p:cNvGrpSpPr/>
-        <p:nvPr/>
-      </p:nvGrpSpPr>
-      <p:grpSpPr>
-        <a:xfrm>
-          <a:off x="0" y="0"/>
-          <a:ext cx="0" cy="0"/>
-          <a:chOff x="0" y="0"/>
-          <a:chExt cx="0" cy="0"/>
-        </a:xfrm>
-      </p:grpSpPr>
-      <p:pic>
-        <p:nvPicPr>
-          <p:cNvPr id="3" name="그림 2" descr="텍스트, 로고, 원, 폰트이(가) 표시된 사진&#10;&#10;AI 생성 콘텐츠는 정확하지 않을 수 있습니다.">
-            <a:extLst>
-              <a:ext uri="{FF2B5EF4-FFF2-40B4-BE49-F238E27FC236}">
-                <a16:creationId xmlns:a16="http://schemas.microsoft.com/office/drawing/2014/main" id="{974F285B-235F-64E1-B756-A9FFAD6A0740}"/>
-              </a:ext>
-            </a:extLst>
-          </p:cNvPr>
-          <p:cNvPicPr>
-            <a:picLocks noChangeAspect="1"/>
-          </p:cNvPicPr>
-          <p:nvPr/>
-        </p:nvPicPr>
-        <p:blipFill>
-          <a:blip r:embed="rId2">
-            <a:alphaModFix amt="20000"/>
-            <a:extLst>
-              <a:ext uri="{28A0092B-C50C-407E-A947-70E740481C1C}">
-                <a14:useLocalDpi xmlns:a14="http://schemas.microsoft.com/office/drawing/2010/main" val="0"/>
-              </a:ext>
-            </a:extLst>
-          </a:blip>
-          <a:stretch>
-            <a:fillRect/>
-          </a:stretch>
-        </p:blipFill>
-        <p:spPr>
-          <a:xfrm>
-            <a:off x="4012070" y="1673061"/>
-            <a:ext cx="4167861" cy="4167861"/>
-          </a:xfrm>
-          <a:prstGeom prst="rect">
-            <a:avLst/>
-          </a:prstGeom>
-        </p:spPr>
-      </p:pic>
-      <p:sp>
-        <p:nvSpPr>
-          <p:cNvPr id="2" name="제목 1">
-            <a:extLst>
-              <a:ext uri="{FF2B5EF4-FFF2-40B4-BE49-F238E27FC236}">
-                <a16:creationId xmlns:a16="http://schemas.microsoft.com/office/drawing/2014/main" id="{3415D7C4-76EF-9D8F-0DE7-D24621930E27}"/>
-              </a:ext>
-            </a:extLst>
-          </p:cNvPr>
-          <p:cNvSpPr>
-            <a:spLocks noGrp="1"/>
-          </p:cNvSpPr>
-          <p:nvPr>
-            <p:ph type="title"/>
-          </p:nvPr>
-        </p:nvSpPr>
-        <p:spPr>
-          <a:xfrm>
-            <a:off x="831850" y="1709739"/>
-            <a:ext cx="10515600" cy="2134292"/>
-          </a:xfrm>
-          <a:effectLst>
-            <a:reflection blurRad="50800" stA="45000" endPos="44000" dir="5400000" sy="-100000" algn="bl" rotWithShape="0"/>
-          </a:effectLst>
-        </p:spPr>
-        <p:txBody>
-          <a:bodyPr/>
-          <a:lstStyle/>
-          <a:p>
-            <a:r>
-              <a:rPr lang="en-US" altLang="ko-KR" b="1" i="0" spc="150">
-                <a:solidFill>
-                  <a:schemeClr val="accent2"/>
-                </a:solidFill>
-              </a:rPr>
-              <a:t>T</a:t>
-            </a:r>
-            <a:r>
-              <a:rPr lang="en-US" altLang="ko-KR" sz="5400" i="0" spc="100"/>
-              <a:t>hank you</a:t>
-            </a:r>
-            <a:endParaRPr lang="ko-KR" altLang="en-US" sz="5400" i="0" spc="100"/>
-          </a:p>
-        </p:txBody>
-      </p:sp>
-      <p:sp>
-        <p:nvSpPr>
-          <p:cNvPr id="4" name="슬라이드 번호 개체 틀 3">
-            <a:extLst>
-              <a:ext uri="{FF2B5EF4-FFF2-40B4-BE49-F238E27FC236}">
-                <a16:creationId xmlns:a16="http://schemas.microsoft.com/office/drawing/2014/main" id="{21E563AD-0BCC-227E-2B40-808AD5FE7787}"/>
-              </a:ext>
-            </a:extLst>
-          </p:cNvPr>
-          <p:cNvSpPr>
-            <a:spLocks noGrp="1"/>
-          </p:cNvSpPr>
-          <p:nvPr>
-            <p:ph type="sldNum" sz="quarter" idx="12"/>
-          </p:nvPr>
-        </p:nvSpPr>
-        <p:spPr/>
-        <p:txBody>
-          <a:bodyPr/>
-          <a:lstStyle/>
-          <a:p>
-            <a:fld id="{109C872D-39A9-4065-8BF3-6A613116E2A1}" type="slidenum">
-              <a:rPr lang="ko-KR" altLang="en-US" smtClean="0"/>
-              <a:t>33</a:t>
-            </a:fld>
-            <a:endParaRPr lang="ko-KR" altLang="en-US"/>
-          </a:p>
-        </p:txBody>
-      </p:sp>
-    </p:spTree>
-    <p:extLst>
-      <p:ext uri="{BB962C8B-B14F-4D97-AF65-F5344CB8AC3E}">
-        <p14:creationId xmlns:p14="http://schemas.microsoft.com/office/powerpoint/2010/main" val="2126883183"/>
       </p:ext>
     </p:extLst>
   </p:cSld>
